--- a/docs/media/第二周_第二次评审_讲述版.pptx
+++ b/docs/media/第二周_第二次评审_讲述版.pptx
@@ -15,9 +15,10 @@
     <p:sldId id="263" r:id="rId9"/>
     <p:sldId id="264" r:id="rId10"/>
     <p:sldId id="265" r:id="rId11"/>
+    <p:sldId id="266" r:id="rId12"/>
   </p:sldIdLst>
   <p:notesMasterIdLst>
-    <p:notesMasterId r:id="rId12"/>
+    <p:notesMasterId r:id="rId13"/>
   </p:notesMasterIdLst>
   <p:sldSz cx="9144000" cy="5143500"/>
   <p:notesSz cx="5143500" cy="9144000"/>
@@ -599,7 +600,7 @@
           <a:p>
             <a:r>
               <a:rPr lang="en-US" dirty="0"/>
-              <a:t>最后做个结论。左边是已经达成的能力，中间是支撑结论的证据：14 项接口断言、5 张截图、视频和报告；右边是后续要关注的五项。一句话总结：Sprint 1 的单品单卖闭环已经完整实现、实测通过，八项目标全部达成，本周以复测和证据补齐正式收尾。我的汇报到这里，谢谢大家，欢迎提问。</a:t>
+              <a:t>这一页是课程的挑战升级需求，我单独说明，避免和本期已完成的内容混淆。A.1 商品管理升级：从单品单卖升级到多商品、二级分类、真实库存、浏览加搜索、多图和富媒体描述。A.2 客户升级：买家从免注册升级为可注册账号，能看到自己的历史下单，商家也能查看客户和购买历史。这两项会替代当前的基线约束，所以先登记为后续升级范围，本期没有实现。</a:t>
             </a:r>
             <a:endParaRPr lang="en-US" dirty="0"/>
           </a:p>
@@ -623,6 +624,94 @@
             <a:fld id="{F7021451-1387-4CA6-816F-3879F97B5CBC}" type="slidenum">
               <a:rPr lang="en-US"/>
               <a:t>10</a:t>
+            </a:fld>
+            <a:endParaRPr lang="en-US"/>
+          </a:p>
+        </p:txBody>
+      </p:sp>
+    </p:spTree>
+    <p:extLst>
+      <p:ext uri="{BB962C8B-B14F-4D97-AF65-F5344CB8AC3E}">
+        <p14:creationId xmlns:p14="http://schemas.microsoft.com/office/powerpoint/2010/main" val="1024086991"/>
+      </p:ext>
+    </p:extLst>
+  </p:cSld>
+  <p:clrMapOvr>
+    <a:masterClrMapping/>
+  </p:clrMapOvr>
+</p:notes>
+</file>
+
+<file path=ppt/notesSlides/notesSlide11.xml><?xml version="1.0" encoding="utf-8"?>
+<p:notes xmlns:a="http://schemas.openxmlformats.org/drawingml/2006/main" xmlns:r="http://schemas.openxmlformats.org/officeDocument/2006/relationships" xmlns:p="http://schemas.openxmlformats.org/presentationml/2006/main">
+  <p:cSld>
+    <p:spTree>
+      <p:nvGrpSpPr>
+        <p:cNvPr id="1" name=""/>
+        <p:cNvGrpSpPr/>
+        <p:nvPr/>
+      </p:nvGrpSpPr>
+      <p:grpSpPr>
+        <a:xfrm>
+          <a:off x="0" y="0"/>
+          <a:ext cx="0" cy="0"/>
+          <a:chOff x="0" y="0"/>
+          <a:chExt cx="0" cy="0"/>
+        </a:xfrm>
+      </p:grpSpPr>
+      <p:sp>
+        <p:nvSpPr>
+          <p:cNvPr id="2" name="Slide Image Placeholder 1"/>
+          <p:cNvSpPr>
+            <a:spLocks noGrp="1" noRot="1" noChangeAspect="1"/>
+          </p:cNvSpPr>
+          <p:nvPr>
+            <p:ph type="sldImg"/>
+          </p:nvPr>
+        </p:nvSpPr>
+        <p:spPr/>
+      </p:sp>
+      <p:sp>
+        <p:nvSpPr>
+          <p:cNvPr id="3" name="Notes Placeholder 2"/>
+          <p:cNvSpPr>
+            <a:spLocks noGrp="1"/>
+          </p:cNvSpPr>
+          <p:nvPr>
+            <p:ph type="body" idx="1"/>
+          </p:nvPr>
+        </p:nvSpPr>
+        <p:spPr/>
+        <p:txBody>
+          <a:bodyPr/>
+          <a:lstStyle/>
+          <a:p>
+            <a:r>
+              <a:rPr lang="en-US" dirty="0"/>
+              <a:t>最后做个结论。左边是已经达成的能力，中间是支撑结论的证据：14 项接口断言、5 张截图、视频和报告；右边是后续要关注的五项。一句话总结：Sprint 1 的单品单卖闭环已经完整实现、实测通过，八项目标全部达成，本周以复测和证据补齐正式收尾。我的汇报到这里，谢谢大家，欢迎提问。</a:t>
+            </a:r>
+            <a:endParaRPr lang="en-US" dirty="0"/>
+          </a:p>
+        </p:txBody>
+      </p:sp>
+      <p:sp>
+        <p:nvSpPr>
+          <p:cNvPr id="4" name="Slide Number Placeholder 3"/>
+          <p:cNvSpPr>
+            <a:spLocks noGrp="1"/>
+          </p:cNvSpPr>
+          <p:nvPr>
+            <p:ph type="sldNum" sz="quarter" idx="10"/>
+          </p:nvPr>
+        </p:nvSpPr>
+        <p:spPr/>
+        <p:txBody>
+          <a:bodyPr/>
+          <a:lstStyle/>
+          <a:p>
+            <a:fld id="{F7021451-1387-4CA6-816F-3879F97B5CBC}" type="slidenum">
+              <a:rPr lang="en-US"/>
+              <a:t>11</a:t>
             </a:fld>
             <a:endParaRPr lang="en-US"/>
           </a:p>
@@ -1925,6 +2014,676 @@
     <p:bg>
       <p:bgPr>
         <a:solidFill>
+          <a:srgbClr val="FBF8F3"/>
+        </a:solidFill>
+      </p:bgPr>
+    </p:bg>
+    <p:spTree>
+      <p:nvGrpSpPr>
+        <p:cNvPr id="1" name=""/>
+        <p:cNvGrpSpPr/>
+        <p:nvPr/>
+      </p:nvGrpSpPr>
+      <p:grpSpPr>
+        <a:xfrm>
+          <a:off x="0" y="0"/>
+          <a:ext cx="0" cy="0"/>
+          <a:chOff x="0" y="0"/>
+          <a:chExt cx="0" cy="0"/>
+        </a:xfrm>
+      </p:grpSpPr>
+      <p:sp>
+        <p:nvSpPr>
+          <p:cNvPr id="2" name="Shape 0"/>
+          <p:cNvSpPr/>
+          <p:nvPr/>
+        </p:nvSpPr>
+        <p:spPr>
+          <a:xfrm>
+            <a:off x="0" y="0"/>
+            <a:ext cx="9144000" cy="82296"/>
+          </a:xfrm>
+          <a:prstGeom prst="rect">
+            <a:avLst/>
+          </a:prstGeom>
+          <a:solidFill>
+            <a:srgbClr val="8A6F47"/>
+          </a:solidFill>
+          <a:ln/>
+        </p:spPr>
+      </p:sp>
+      <p:sp>
+        <p:nvSpPr>
+          <p:cNvPr id="3" name="Text 1"/>
+          <p:cNvSpPr/>
+          <p:nvPr/>
+        </p:nvSpPr>
+        <p:spPr>
+          <a:xfrm>
+            <a:off x="457200" y="237744"/>
+            <a:ext cx="8229600" cy="420624"/>
+          </a:xfrm>
+          <a:prstGeom prst="rect">
+            <a:avLst/>
+          </a:prstGeom>
+          <a:noFill/>
+          <a:ln/>
+        </p:spPr>
+        <p:txBody>
+          <a:bodyPr wrap="square" lIns="0" tIns="0" rIns="0" bIns="0" rtlCol="0" anchor="ctr"/>
+          <a:lstStyle/>
+          <a:p>
+            <a:pPr indent="0" marL="0">
+              <a:buNone/>
+            </a:pPr>
+            <a:r>
+              <a:rPr lang="en-US" sz="2200" b="1" dirty="0">
+                <a:solidFill>
+                  <a:srgbClr val="2B2622"/>
+                </a:solidFill>
+                <a:latin typeface="Microsoft YaHei" pitchFamily="34" charset="0"/>
+                <a:ea typeface="Microsoft YaHei" pitchFamily="34" charset="-122"/>
+                <a:cs typeface="Microsoft YaHei" pitchFamily="34" charset="-120"/>
+              </a:rPr>
+              <a:t>挑战升级范围（A.1 / A.2）</a:t>
+            </a:r>
+            <a:endParaRPr lang="en-US" sz="2200" dirty="0"/>
+          </a:p>
+        </p:txBody>
+      </p:sp>
+      <p:sp>
+        <p:nvSpPr>
+          <p:cNvPr id="4" name="Text 2"/>
+          <p:cNvSpPr/>
+          <p:nvPr/>
+        </p:nvSpPr>
+        <p:spPr>
+          <a:xfrm>
+            <a:off x="457200" y="694944"/>
+            <a:ext cx="8229600" cy="274320"/>
+          </a:xfrm>
+          <a:prstGeom prst="rect">
+            <a:avLst/>
+          </a:prstGeom>
+          <a:noFill/>
+          <a:ln/>
+        </p:spPr>
+        <p:txBody>
+          <a:bodyPr wrap="square" lIns="0" tIns="0" rIns="0" bIns="0" rtlCol="0" anchor="ctr"/>
+          <a:lstStyle/>
+          <a:p>
+            <a:pPr indent="0" marL="0">
+              <a:buNone/>
+            </a:pPr>
+            <a:r>
+              <a:rPr lang="en-US" sz="1100" dirty="0">
+                <a:solidFill>
+                  <a:srgbClr val="8A8178"/>
+                </a:solidFill>
+                <a:latin typeface="Microsoft YaHei" pitchFamily="34" charset="0"/>
+                <a:ea typeface="Microsoft YaHei" pitchFamily="34" charset="-122"/>
+                <a:cs typeface="Microsoft YaHei" pitchFamily="34" charset="-120"/>
+              </a:rPr>
+              <a:t>课程升级需求，尚未实现，登记为后续升级范围</a:t>
+            </a:r>
+            <a:endParaRPr lang="en-US" sz="1100" dirty="0"/>
+          </a:p>
+        </p:txBody>
+      </p:sp>
+      <p:sp>
+        <p:nvSpPr>
+          <p:cNvPr id="5" name="Shape 3"/>
+          <p:cNvSpPr/>
+          <p:nvPr/>
+        </p:nvSpPr>
+        <p:spPr>
+          <a:xfrm>
+            <a:off x="457200" y="1188720"/>
+            <a:ext cx="3977640" cy="2286000"/>
+          </a:xfrm>
+          <a:prstGeom prst="rect">
+            <a:avLst/>
+          </a:prstGeom>
+          <a:solidFill>
+            <a:srgbClr val="FFFFFF"/>
+          </a:solidFill>
+          <a:ln w="9525">
+            <a:solidFill>
+              <a:srgbClr val="E3DDD4"/>
+            </a:solidFill>
+            <a:prstDash val="solid"/>
+          </a:ln>
+          <a:effectLst>
+            <a:outerShdw sx="100000" sy="100000" kx="0" ky="0" algn="bl" rotWithShape="0" blurRad="101600" dist="25400" dir="8100000">
+              <a:srgbClr val="000000">
+                <a:alpha val="10000"/>
+              </a:srgbClr>
+            </a:outerShdw>
+          </a:effectLst>
+        </p:spPr>
+      </p:sp>
+      <p:sp>
+        <p:nvSpPr>
+          <p:cNvPr id="6" name="Shape 4"/>
+          <p:cNvSpPr/>
+          <p:nvPr/>
+        </p:nvSpPr>
+        <p:spPr>
+          <a:xfrm>
+            <a:off x="457200" y="1188720"/>
+            <a:ext cx="64008" cy="2286000"/>
+          </a:xfrm>
+          <a:prstGeom prst="rect">
+            <a:avLst/>
+          </a:prstGeom>
+          <a:solidFill>
+            <a:srgbClr val="8A6F47"/>
+          </a:solidFill>
+          <a:ln/>
+        </p:spPr>
+      </p:sp>
+      <p:sp>
+        <p:nvSpPr>
+          <p:cNvPr id="7" name="Text 5"/>
+          <p:cNvSpPr/>
+          <p:nvPr/>
+        </p:nvSpPr>
+        <p:spPr>
+          <a:xfrm>
+            <a:off x="658368" y="1298448"/>
+            <a:ext cx="3648456" cy="274320"/>
+          </a:xfrm>
+          <a:prstGeom prst="rect">
+            <a:avLst/>
+          </a:prstGeom>
+          <a:noFill/>
+          <a:ln/>
+        </p:spPr>
+        <p:txBody>
+          <a:bodyPr wrap="square" lIns="0" tIns="0" rIns="0" bIns="0" rtlCol="0" anchor="ctr"/>
+          <a:lstStyle/>
+          <a:p>
+            <a:pPr indent="0" marL="0">
+              <a:buNone/>
+            </a:pPr>
+            <a:r>
+              <a:rPr lang="en-US" sz="1250" b="1" dirty="0">
+                <a:solidFill>
+                  <a:srgbClr val="2B2622"/>
+                </a:solidFill>
+                <a:latin typeface="Microsoft YaHei" pitchFamily="34" charset="0"/>
+                <a:ea typeface="Microsoft YaHei" pitchFamily="34" charset="-122"/>
+                <a:cs typeface="Microsoft YaHei" pitchFamily="34" charset="-120"/>
+              </a:rPr>
+              <a:t>A.1 商品管理升级</a:t>
+            </a:r>
+            <a:endParaRPr lang="en-US" sz="1250" dirty="0"/>
+          </a:p>
+        </p:txBody>
+      </p:sp>
+      <p:sp>
+        <p:nvSpPr>
+          <p:cNvPr id="8" name="Text 6"/>
+          <p:cNvSpPr/>
+          <p:nvPr/>
+        </p:nvSpPr>
+        <p:spPr>
+          <a:xfrm>
+            <a:off x="658368" y="1609344"/>
+            <a:ext cx="3648456" cy="1737360"/>
+          </a:xfrm>
+          <a:prstGeom prst="rect">
+            <a:avLst/>
+          </a:prstGeom>
+          <a:noFill/>
+          <a:ln/>
+        </p:spPr>
+        <p:txBody>
+          <a:bodyPr wrap="square" lIns="0" tIns="0" rIns="0" bIns="0" rtlCol="0" anchor="t"/>
+          <a:lstStyle/>
+          <a:p>
+            <a:pPr marL="342900" indent="-342900">
+              <a:lnSpc>
+                <a:spcPct val="105000"/>
+              </a:lnSpc>
+              <a:spcAft>
+                <a:spcPts val="300"/>
+              </a:spcAft>
+              <a:buSzPct val="100000"/>
+              <a:buChar char="•"/>
+            </a:pPr>
+            <a:r>
+              <a:rPr lang="en-US" sz="1000" dirty="0">
+                <a:solidFill>
+                  <a:srgbClr val="4A423C"/>
+                </a:solidFill>
+                <a:latin typeface="Microsoft YaHei" pitchFamily="34" charset="0"/>
+                <a:ea typeface="Microsoft YaHei" pitchFamily="34" charset="-122"/>
+                <a:cs typeface="Microsoft YaHei" pitchFamily="34" charset="-120"/>
+              </a:rPr>
+              <a:t>支持同时发布多个商品</a:t>
+            </a:r>
+            <a:endParaRPr lang="en-US" sz="1000" dirty="0"/>
+          </a:p>
+          <a:p>
+            <a:pPr marL="342900" indent="-342900">
+              <a:lnSpc>
+                <a:spcPct val="105000"/>
+              </a:lnSpc>
+              <a:spcAft>
+                <a:spcPts val="300"/>
+              </a:spcAft>
+              <a:buSzPct val="100000"/>
+              <a:buChar char="•"/>
+            </a:pPr>
+            <a:r>
+              <a:rPr lang="en-US" sz="1000" dirty="0">
+                <a:solidFill>
+                  <a:srgbClr val="4A423C"/>
+                </a:solidFill>
+                <a:latin typeface="Microsoft YaHei" pitchFamily="34" charset="0"/>
+                <a:ea typeface="Microsoft YaHei" pitchFamily="34" charset="-122"/>
+                <a:cs typeface="Microsoft YaHei" pitchFamily="34" charset="-120"/>
+              </a:rPr>
+              <a:t>商品支持 2 级类别管理</a:t>
+            </a:r>
+            <a:endParaRPr lang="en-US" sz="1000" dirty="0"/>
+          </a:p>
+          <a:p>
+            <a:pPr marL="342900" indent="-342900">
+              <a:lnSpc>
+                <a:spcPct val="105000"/>
+              </a:lnSpc>
+              <a:spcAft>
+                <a:spcPts val="300"/>
+              </a:spcAft>
+              <a:buSzPct val="100000"/>
+              <a:buChar char="•"/>
+            </a:pPr>
+            <a:r>
+              <a:rPr lang="en-US" sz="1000" dirty="0">
+                <a:solidFill>
+                  <a:srgbClr val="4A423C"/>
+                </a:solidFill>
+                <a:latin typeface="Microsoft YaHei" pitchFamily="34" charset="0"/>
+                <a:ea typeface="Microsoft YaHei" pitchFamily="34" charset="-122"/>
+                <a:cs typeface="Microsoft YaHei" pitchFamily="34" charset="-120"/>
+              </a:rPr>
+              <a:t>每种商品有库存，库存为 0 自动下架</a:t>
+            </a:r>
+            <a:endParaRPr lang="en-US" sz="1000" dirty="0"/>
+          </a:p>
+          <a:p>
+            <a:pPr marL="342900" indent="-342900">
+              <a:lnSpc>
+                <a:spcPct val="105000"/>
+              </a:lnSpc>
+              <a:spcAft>
+                <a:spcPts val="300"/>
+              </a:spcAft>
+              <a:buSzPct val="100000"/>
+              <a:buChar char="•"/>
+            </a:pPr>
+            <a:r>
+              <a:rPr lang="en-US" sz="1000" dirty="0">
+                <a:solidFill>
+                  <a:srgbClr val="4A423C"/>
+                </a:solidFill>
+                <a:latin typeface="Microsoft YaHei" pitchFamily="34" charset="0"/>
+                <a:ea typeface="Microsoft YaHei" pitchFamily="34" charset="-122"/>
+                <a:cs typeface="Microsoft YaHei" pitchFamily="34" charset="-120"/>
+              </a:rPr>
+              <a:t>可浏览 + 搜索两种方式查找</a:t>
+            </a:r>
+            <a:endParaRPr lang="en-US" sz="1000" dirty="0"/>
+          </a:p>
+          <a:p>
+            <a:pPr marL="342900" indent="-342900">
+              <a:lnSpc>
+                <a:spcPct val="105000"/>
+              </a:lnSpc>
+              <a:spcAft>
+                <a:spcPts val="300"/>
+              </a:spcAft>
+              <a:buSzPct val="100000"/>
+              <a:buChar char="•"/>
+            </a:pPr>
+            <a:r>
+              <a:rPr lang="en-US" sz="1000" dirty="0">
+                <a:solidFill>
+                  <a:srgbClr val="4A423C"/>
+                </a:solidFill>
+                <a:latin typeface="Microsoft YaHei" pitchFamily="34" charset="0"/>
+                <a:ea typeface="Microsoft YaHei" pitchFamily="34" charset="-122"/>
+                <a:cs typeface="Microsoft YaHei" pitchFamily="34" charset="-120"/>
+              </a:rPr>
+              <a:t>多张商品图片，描述支持富媒体</a:t>
+            </a:r>
+            <a:endParaRPr lang="en-US" sz="1000" dirty="0"/>
+          </a:p>
+        </p:txBody>
+      </p:sp>
+      <p:sp>
+        <p:nvSpPr>
+          <p:cNvPr id="9" name="Shape 7"/>
+          <p:cNvSpPr/>
+          <p:nvPr/>
+        </p:nvSpPr>
+        <p:spPr>
+          <a:xfrm>
+            <a:off x="4709160" y="1188720"/>
+            <a:ext cx="3977640" cy="2286000"/>
+          </a:xfrm>
+          <a:prstGeom prst="rect">
+            <a:avLst/>
+          </a:prstGeom>
+          <a:solidFill>
+            <a:srgbClr val="FFFFFF"/>
+          </a:solidFill>
+          <a:ln w="9525">
+            <a:solidFill>
+              <a:srgbClr val="E3DDD4"/>
+            </a:solidFill>
+            <a:prstDash val="solid"/>
+          </a:ln>
+          <a:effectLst>
+            <a:outerShdw sx="100000" sy="100000" kx="0" ky="0" algn="bl" rotWithShape="0" blurRad="101600" dist="25400" dir="8100000">
+              <a:srgbClr val="000000">
+                <a:alpha val="10000"/>
+              </a:srgbClr>
+            </a:outerShdw>
+          </a:effectLst>
+        </p:spPr>
+      </p:sp>
+      <p:sp>
+        <p:nvSpPr>
+          <p:cNvPr id="10" name="Shape 8"/>
+          <p:cNvSpPr/>
+          <p:nvPr/>
+        </p:nvSpPr>
+        <p:spPr>
+          <a:xfrm>
+            <a:off x="4709160" y="1188720"/>
+            <a:ext cx="64008" cy="2286000"/>
+          </a:xfrm>
+          <a:prstGeom prst="rect">
+            <a:avLst/>
+          </a:prstGeom>
+          <a:solidFill>
+            <a:srgbClr val="B85042"/>
+          </a:solidFill>
+          <a:ln/>
+        </p:spPr>
+      </p:sp>
+      <p:sp>
+        <p:nvSpPr>
+          <p:cNvPr id="11" name="Text 9"/>
+          <p:cNvSpPr/>
+          <p:nvPr/>
+        </p:nvSpPr>
+        <p:spPr>
+          <a:xfrm>
+            <a:off x="4910328" y="1298448"/>
+            <a:ext cx="3648456" cy="274320"/>
+          </a:xfrm>
+          <a:prstGeom prst="rect">
+            <a:avLst/>
+          </a:prstGeom>
+          <a:noFill/>
+          <a:ln/>
+        </p:spPr>
+        <p:txBody>
+          <a:bodyPr wrap="square" lIns="0" tIns="0" rIns="0" bIns="0" rtlCol="0" anchor="ctr"/>
+          <a:lstStyle/>
+          <a:p>
+            <a:pPr indent="0" marL="0">
+              <a:buNone/>
+            </a:pPr>
+            <a:r>
+              <a:rPr lang="en-US" sz="1250" b="1" dirty="0">
+                <a:solidFill>
+                  <a:srgbClr val="2B2622"/>
+                </a:solidFill>
+                <a:latin typeface="Microsoft YaHei" pitchFamily="34" charset="0"/>
+                <a:ea typeface="Microsoft YaHei" pitchFamily="34" charset="-122"/>
+                <a:cs typeface="Microsoft YaHei" pitchFamily="34" charset="-120"/>
+              </a:rPr>
+              <a:t>A.2 客户升级</a:t>
+            </a:r>
+            <a:endParaRPr lang="en-US" sz="1250" dirty="0"/>
+          </a:p>
+        </p:txBody>
+      </p:sp>
+      <p:sp>
+        <p:nvSpPr>
+          <p:cNvPr id="12" name="Text 10"/>
+          <p:cNvSpPr/>
+          <p:nvPr/>
+        </p:nvSpPr>
+        <p:spPr>
+          <a:xfrm>
+            <a:off x="4910328" y="1609344"/>
+            <a:ext cx="3648456" cy="1737360"/>
+          </a:xfrm>
+          <a:prstGeom prst="rect">
+            <a:avLst/>
+          </a:prstGeom>
+          <a:noFill/>
+          <a:ln/>
+        </p:spPr>
+        <p:txBody>
+          <a:bodyPr wrap="square" lIns="0" tIns="0" rIns="0" bIns="0" rtlCol="0" anchor="t"/>
+          <a:lstStyle/>
+          <a:p>
+            <a:pPr marL="342900" indent="-342900">
+              <a:lnSpc>
+                <a:spcPct val="105000"/>
+              </a:lnSpc>
+              <a:spcAft>
+                <a:spcPts val="300"/>
+              </a:spcAft>
+              <a:buSzPct val="100000"/>
+              <a:buChar char="•"/>
+            </a:pPr>
+            <a:r>
+              <a:rPr lang="en-US" sz="1000" dirty="0">
+                <a:solidFill>
+                  <a:srgbClr val="4A423C"/>
+                </a:solidFill>
+                <a:latin typeface="Microsoft YaHei" pitchFamily="34" charset="0"/>
+                <a:ea typeface="Microsoft YaHei" pitchFamily="34" charset="-122"/>
+                <a:cs typeface="Microsoft YaHei" pitchFamily="34" charset="-120"/>
+              </a:rPr>
+              <a:t>客户自由注册：用户名 / 密码 / 电话 / 默认交易地点</a:t>
+            </a:r>
+            <a:endParaRPr lang="en-US" sz="1000" dirty="0"/>
+          </a:p>
+          <a:p>
+            <a:pPr marL="342900" indent="-342900">
+              <a:lnSpc>
+                <a:spcPct val="105000"/>
+              </a:lnSpc>
+              <a:spcAft>
+                <a:spcPts val="300"/>
+              </a:spcAft>
+              <a:buSzPct val="100000"/>
+              <a:buChar char="•"/>
+            </a:pPr>
+            <a:r>
+              <a:rPr lang="en-US" sz="1000" dirty="0">
+                <a:solidFill>
+                  <a:srgbClr val="4A423C"/>
+                </a:solidFill>
+                <a:latin typeface="Microsoft YaHei" pitchFamily="34" charset="0"/>
+                <a:ea typeface="Microsoft YaHei" pitchFamily="34" charset="-122"/>
+                <a:cs typeface="Microsoft YaHei" pitchFamily="34" charset="-120"/>
+              </a:rPr>
+              <a:t>客户登录后可查看历史下单记录</a:t>
+            </a:r>
+            <a:endParaRPr lang="en-US" sz="1000" dirty="0"/>
+          </a:p>
+          <a:p>
+            <a:pPr marL="342900" indent="-342900">
+              <a:lnSpc>
+                <a:spcPct val="105000"/>
+              </a:lnSpc>
+              <a:spcAft>
+                <a:spcPts val="300"/>
+              </a:spcAft>
+              <a:buSzPct val="100000"/>
+              <a:buChar char="•"/>
+            </a:pPr>
+            <a:r>
+              <a:rPr lang="en-US" sz="1000" dirty="0">
+                <a:solidFill>
+                  <a:srgbClr val="4A423C"/>
+                </a:solidFill>
+                <a:latin typeface="Microsoft YaHei" pitchFamily="34" charset="0"/>
+                <a:ea typeface="Microsoft YaHei" pitchFamily="34" charset="-122"/>
+                <a:cs typeface="Microsoft YaHei" pitchFamily="34" charset="-120"/>
+              </a:rPr>
+              <a:t>商家可查看所有注册客户信息</a:t>
+            </a:r>
+            <a:endParaRPr lang="en-US" sz="1000" dirty="0"/>
+          </a:p>
+          <a:p>
+            <a:pPr marL="342900" indent="-342900">
+              <a:lnSpc>
+                <a:spcPct val="105000"/>
+              </a:lnSpc>
+              <a:spcAft>
+                <a:spcPts val="300"/>
+              </a:spcAft>
+              <a:buSzPct val="100000"/>
+              <a:buChar char="•"/>
+            </a:pPr>
+            <a:r>
+              <a:rPr lang="en-US" sz="1000" dirty="0">
+                <a:solidFill>
+                  <a:srgbClr val="4A423C"/>
+                </a:solidFill>
+                <a:latin typeface="Microsoft YaHei" pitchFamily="34" charset="0"/>
+                <a:ea typeface="Microsoft YaHei" pitchFamily="34" charset="-122"/>
+                <a:cs typeface="Microsoft YaHei" pitchFamily="34" charset="-120"/>
+              </a:rPr>
+              <a:t>商家可查看客户的购买历史</a:t>
+            </a:r>
+            <a:endParaRPr lang="en-US" sz="1000" dirty="0"/>
+          </a:p>
+        </p:txBody>
+      </p:sp>
+      <p:sp>
+        <p:nvSpPr>
+          <p:cNvPr id="13" name="Shape 11"/>
+          <p:cNvSpPr/>
+          <p:nvPr/>
+        </p:nvSpPr>
+        <p:spPr>
+          <a:xfrm>
+            <a:off x="457200" y="3657600"/>
+            <a:ext cx="8229600" cy="777240"/>
+          </a:xfrm>
+          <a:prstGeom prst="rect">
+            <a:avLst/>
+          </a:prstGeom>
+          <a:solidFill>
+            <a:srgbClr val="E7E8D1"/>
+          </a:solidFill>
+          <a:ln/>
+        </p:spPr>
+      </p:sp>
+      <p:sp>
+        <p:nvSpPr>
+          <p:cNvPr id="14" name="Text 12"/>
+          <p:cNvSpPr/>
+          <p:nvPr/>
+        </p:nvSpPr>
+        <p:spPr>
+          <a:xfrm>
+            <a:off x="658368" y="3657600"/>
+            <a:ext cx="7863840" cy="777240"/>
+          </a:xfrm>
+          <a:prstGeom prst="rect">
+            <a:avLst/>
+          </a:prstGeom>
+          <a:noFill/>
+          <a:ln/>
+        </p:spPr>
+        <p:txBody>
+          <a:bodyPr wrap="square" lIns="0" tIns="0" rIns="0" bIns="0" rtlCol="0" anchor="ctr"/>
+          <a:lstStyle/>
+          <a:p>
+            <a:pPr indent="0" marL="0">
+              <a:buNone/>
+            </a:pPr>
+            <a:r>
+              <a:rPr lang="en-US" sz="1000" dirty="0">
+                <a:solidFill>
+                  <a:srgbClr val="2B2622"/>
+                </a:solidFill>
+                <a:latin typeface="Microsoft YaHei" pitchFamily="34" charset="0"/>
+                <a:ea typeface="Microsoft YaHei" pitchFamily="34" charset="-122"/>
+                <a:cs typeface="Microsoft YaHei" pitchFamily="34" charset="-120"/>
+              </a:rPr>
+              <a:t>与当前基线的关系：A.1 替代「单品单卖」、A.2 替代「买家免注册」，需调整状态机、队列、鉴权与数据模型，建议作为独立升级迭代评估。</a:t>
+            </a:r>
+            <a:endParaRPr lang="en-US" sz="1000" dirty="0"/>
+          </a:p>
+        </p:txBody>
+      </p:sp>
+      <p:sp>
+        <p:nvSpPr>
+          <p:cNvPr id="15" name="Text 13"/>
+          <p:cNvSpPr/>
+          <p:nvPr/>
+        </p:nvSpPr>
+        <p:spPr>
+          <a:xfrm>
+            <a:off x="8412480" y="4617720"/>
+            <a:ext cx="457200" cy="256032"/>
+          </a:xfrm>
+          <a:prstGeom prst="rect">
+            <a:avLst/>
+          </a:prstGeom>
+          <a:noFill/>
+          <a:ln/>
+        </p:spPr>
+        <p:txBody>
+          <a:bodyPr wrap="square" lIns="0" tIns="0" rIns="0" bIns="0" rtlCol="0" anchor="ctr"/>
+          <a:lstStyle/>
+          <a:p>
+            <a:pPr algn="r" indent="0" marL="0">
+              <a:buNone/>
+            </a:pPr>
+            <a:r>
+              <a:rPr lang="en-US" sz="900" dirty="0">
+                <a:solidFill>
+                  <a:srgbClr val="8A8178"/>
+                </a:solidFill>
+                <a:latin typeface="Microsoft YaHei" pitchFamily="34" charset="0"/>
+                <a:ea typeface="Microsoft YaHei" pitchFamily="34" charset="-122"/>
+                <a:cs typeface="Microsoft YaHei" pitchFamily="34" charset="-120"/>
+              </a:rPr>
+              <a:t>10</a:t>
+            </a:r>
+            <a:endParaRPr lang="en-US" sz="900" dirty="0"/>
+          </a:p>
+        </p:txBody>
+      </p:sp>
+    </p:spTree>
+  </p:cSld>
+  <p:clrMapOvr>
+    <a:masterClrMapping/>
+  </p:clrMapOvr>
+</p:sld>
+</file>
+
+<file path=ppt/slides/slide11.xml><?xml version="1.0" encoding="utf-8"?>
+<p:sld xmlns:a="http://schemas.openxmlformats.org/drawingml/2006/main" xmlns:r="http://schemas.openxmlformats.org/officeDocument/2006/relationships" xmlns:p="http://schemas.openxmlformats.org/presentationml/2006/main">
+  <p:cSld name="Slide 11">
+    <p:bg>
+      <p:bgPr>
+        <a:solidFill>
           <a:srgbClr val="2B2622"/>
         </a:solidFill>
       </p:bgPr>

--- a/docs/media/第二周_第二次评审_讲述版.pptx
+++ b/docs/media/第二周_第二次评审_讲述版.pptx
@@ -600,7 +600,7 @@
           <a:p>
             <a:r>
               <a:rPr lang="en-US" dirty="0"/>
-              <a:t>这一页是课程的挑战升级需求，我单独说明，避免和本期已完成的内容混淆。A.1 商品管理升级：从单品单卖升级到多商品、二级分类、真实库存、浏览加搜索、多图和富媒体描述。A.2 客户升级：买家从免注册升级为可注册账号，能看到自己的历史下单，商家也能查看客户和购买历史。这两项会替代当前的基线约束，所以先登记为后续升级范围，本期没有实现。</a:t>
+              <a:t>这一页是课程的挑战升级，现在两项都已完成实现并通过接口联调，提交号 4f2fde7。A.1 商品管理：从单品单卖升级为多商品、二级分类、真实库存、浏览加搜索、多图和富媒体描述，成交会扣库存，库存归零自动下架。A.2 客户升级：买家可注册账号、查看历史下单，商家也能查看客户和购买历史。</a:t>
             </a:r>
             <a:endParaRPr lang="en-US" dirty="0"/>
           </a:p>
@@ -2047,7 +2047,7 @@
             <a:avLst/>
           </a:prstGeom>
           <a:solidFill>
-            <a:srgbClr val="8A6F47"/>
+            <a:srgbClr val="6B8E7B"/>
           </a:solidFill>
           <a:ln/>
         </p:spPr>
@@ -2085,7 +2085,7 @@
                 <a:ea typeface="Microsoft YaHei" pitchFamily="34" charset="-122"/>
                 <a:cs typeface="Microsoft YaHei" pitchFamily="34" charset="-120"/>
               </a:rPr>
-              <a:t>挑战升级范围（A.1 / A.2）</a:t>
+              <a:t>挑战升级（A.1 / A.2）· 已实现</a:t>
             </a:r>
             <a:endParaRPr lang="en-US" sz="2200" dirty="0"/>
           </a:p>
@@ -2124,7 +2124,7 @@
                 <a:ea typeface="Microsoft YaHei" pitchFamily="34" charset="-122"/>
                 <a:cs typeface="Microsoft YaHei" pitchFamily="34" charset="-120"/>
               </a:rPr>
-              <a:t>课程升级需求，尚未实现，登记为后续升级范围</a:t>
+              <a:t>2026-10-22 完成实现并通过接口联调（提交 4f2fde7）</a:t>
             </a:r>
             <a:endParaRPr lang="en-US" sz="1100" dirty="0"/>
           </a:p>
@@ -2177,7 +2177,7 @@
             <a:avLst/>
           </a:prstGeom>
           <a:solidFill>
-            <a:srgbClr val="8A6F47"/>
+            <a:srgbClr val="6B8E7B"/>
           </a:solidFill>
           <a:ln/>
         </p:spPr>
@@ -2215,7 +2215,7 @@
                 <a:ea typeface="Microsoft YaHei" pitchFamily="34" charset="-122"/>
                 <a:cs typeface="Microsoft YaHei" pitchFamily="34" charset="-120"/>
               </a:rPr>
-              <a:t>A.1 商品管理升级</a:t>
+              <a:t>A.1 商品管理升级（已实现）</a:t>
             </a:r>
             <a:endParaRPr lang="en-US" sz="1250" dirty="0"/>
           </a:p>
@@ -2410,7 +2410,7 @@
             <a:avLst/>
           </a:prstGeom>
           <a:solidFill>
-            <a:srgbClr val="B85042"/>
+            <a:srgbClr val="6B8E7B"/>
           </a:solidFill>
           <a:ln/>
         </p:spPr>
@@ -2448,7 +2448,7 @@
                 <a:ea typeface="Microsoft YaHei" pitchFamily="34" charset="-122"/>
                 <a:cs typeface="Microsoft YaHei" pitchFamily="34" charset="-120"/>
               </a:rPr>
-              <a:t>A.2 客户升级</a:t>
+              <a:t>A.2 客户升级（已实现）</a:t>
             </a:r>
             <a:endParaRPr lang="en-US" sz="1250" dirty="0"/>
           </a:p>
@@ -2617,7 +2617,7 @@
               <a:buNone/>
             </a:pPr>
             <a:r>
-              <a:rPr lang="en-US" sz="1000" dirty="0">
+              <a:rPr lang="en-US" sz="950" dirty="0">
                 <a:solidFill>
                   <a:srgbClr val="2B2622"/>
                 </a:solidFill>
@@ -2625,9 +2625,9 @@
                 <a:ea typeface="Microsoft YaHei" pitchFamily="34" charset="-122"/>
                 <a:cs typeface="Microsoft YaHei" pitchFamily="34" charset="-120"/>
               </a:rPr>
-              <a:t>与当前基线的关系：A.1 替代「单品单卖」、A.2 替代「买家免注册」，需调整状态机、队列、鉴权与数据模型，建议作为独立升级迭代评估。</a:t>
-            </a:r>
-            <a:endParaRPr lang="en-US" sz="1000" dirty="0"/>
+              <a:t>实现要点：新增 Category / Customer 实体与客户鉴权；成交扣减库存、库存归零自动下架；首页多商品列表 + 搜索 + 两级分类；详情页多图轮播 + 富媒体；客户注册登录与历史订单；商家客户管理。</a:t>
+            </a:r>
+            <a:endParaRPr lang="en-US" sz="950" dirty="0"/>
           </a:p>
         </p:txBody>
       </p:sp>

--- a/docs/media/第二周_第二次评审_讲述版.pptx
+++ b/docs/media/第二周_第二次评审_讲述版.pptx
@@ -9707,7 +9707,7 @@
                           <a:ea typeface="Microsoft YaHei" pitchFamily="34" charset="-122"/>
                           <a:cs typeface="Microsoft YaHei" pitchFamily="34" charset="-120"/>
                         </a:rPr>
-                        <a:t>戴英杰（测试）</a:t>
+                        <a:t>方浩昱（测试）</a:t>
                       </a:r>
                       <a:endParaRPr lang="en-US" sz="1000" dirty="0">
                         <a:latin typeface="Microsoft YaHei" charset="0"/>

--- a/docs/media/第二周_第二次评审_讲述版.pptx
+++ b/docs/media/第二周_第二次评审_讲述版.pptx
@@ -18,9 +18,10 @@
     <p:sldId id="266" r:id="rId12"/>
     <p:sldId id="267" r:id="rId13"/>
     <p:sldId id="268" r:id="rId14"/>
+    <p:sldId id="269" r:id="rId15"/>
   </p:sldIdLst>
   <p:notesMasterIdLst>
-    <p:notesMasterId r:id="rId15"/>
+    <p:notesMasterId r:id="rId16"/>
   </p:notesMasterIdLst>
   <p:sldSz cx="9144000" cy="5143500"/>
   <p:notesSz cx="5143500" cy="9144000"/>
@@ -778,7 +779,7 @@
           <a:p>
             <a:r>
               <a:rPr lang="en-US" dirty="0"/>
-              <a:t>遗留项我如实列出，共六类：买家端历史浏览页没做、基线自检脚本需要多商品版、统计看板前端没接、意向终态命名要统一、并发没压测、录屏没做。它们都不影响基线闭环和 A.1、A.2 的主要验收，已写进第二次评审报告，后续按排期决定。</a:t>
+              <a:t>这一页把分工落到每个人和具体界面上。丁月诚是前端：首页多商品列表、关键词搜索、两级分类筛选，还有详情页多图和富媒体，以及客户、卖家的几个页面 —— 对应截图右边就是首页。方浩昱是后端②：商品模型加了库存、多图、两级分类字段，成交扣库存、扣到零自动下架，客户侧的注册、鉴权、历史下单、商家客户视图也是他做的。王则凯是后端①：商品的发布编辑搜索接口、分类树和分类维护接口。戴英杰是测试：A.1/A.2 的界面走查和端到端验证，12 项升级用例结果复核，另外 Sprint 1 的主流程验证记录也是他。我这边是文档和组长工作：需求条目、报告、14 页讲述版 PPT、测试说明和 Wiki 发布。右下角是本轮的交付规模。</a:t>
             </a:r>
             <a:endParaRPr lang="en-US" dirty="0"/>
           </a:p>
@@ -866,7 +867,7 @@
           <a:p>
             <a:r>
               <a:rPr lang="en-US" dirty="0"/>
-              <a:t>最后总结。左边是已达成：Sprint 1 八项目标全部达成、单品单卖闭环实测通过，A.1、A.2 挑战升级已经实现。中间是证据：接口 14 项、升级 12 项、12 张截图、视频和报告。右边是后续要关注的五项，其中多商品版自检脚本优先。一句话：基线已收尾，挑战升级已落地，商品侧和客户侧的每条升级要求都能落到具体用例和截图上。谢谢大家，欢迎提问。</a:t>
+              <a:t>遗留项我如实列出，共六类：买家端历史浏览页没做、基线自检脚本需要多商品版、统计看板前端没接、意向终态命名要统一、并发没压测、录屏没做。它们都不影响基线闭环和 A.1、A.2 的主要验收，已写进第二次评审报告，后续按排期决定。</a:t>
             </a:r>
             <a:endParaRPr lang="en-US" dirty="0"/>
           </a:p>
@@ -890,6 +891,94 @@
             <a:fld id="{F7021451-1387-4CA6-816F-3879F97B5CBC}" type="slidenum">
               <a:rPr lang="en-US"/>
               <a:t>13</a:t>
+            </a:fld>
+            <a:endParaRPr lang="en-US"/>
+          </a:p>
+        </p:txBody>
+      </p:sp>
+    </p:spTree>
+    <p:extLst>
+      <p:ext uri="{BB962C8B-B14F-4D97-AF65-F5344CB8AC3E}">
+        <p14:creationId xmlns:p14="http://schemas.microsoft.com/office/powerpoint/2010/main" val="1024086991"/>
+      </p:ext>
+    </p:extLst>
+  </p:cSld>
+  <p:clrMapOvr>
+    <a:masterClrMapping/>
+  </p:clrMapOvr>
+</p:notes>
+</file>
+
+<file path=ppt/notesSlides/notesSlide14.xml><?xml version="1.0" encoding="utf-8"?>
+<p:notes xmlns:a="http://schemas.openxmlformats.org/drawingml/2006/main" xmlns:r="http://schemas.openxmlformats.org/officeDocument/2006/relationships" xmlns:p="http://schemas.openxmlformats.org/presentationml/2006/main">
+  <p:cSld>
+    <p:spTree>
+      <p:nvGrpSpPr>
+        <p:cNvPr id="1" name=""/>
+        <p:cNvGrpSpPr/>
+        <p:nvPr/>
+      </p:nvGrpSpPr>
+      <p:grpSpPr>
+        <a:xfrm>
+          <a:off x="0" y="0"/>
+          <a:ext cx="0" cy="0"/>
+          <a:chOff x="0" y="0"/>
+          <a:chExt cx="0" cy="0"/>
+        </a:xfrm>
+      </p:grpSpPr>
+      <p:sp>
+        <p:nvSpPr>
+          <p:cNvPr id="2" name="Slide Image Placeholder 1"/>
+          <p:cNvSpPr>
+            <a:spLocks noGrp="1" noRot="1" noChangeAspect="1"/>
+          </p:cNvSpPr>
+          <p:nvPr>
+            <p:ph type="sldImg"/>
+          </p:nvPr>
+        </p:nvSpPr>
+        <p:spPr/>
+      </p:sp>
+      <p:sp>
+        <p:nvSpPr>
+          <p:cNvPr id="3" name="Notes Placeholder 2"/>
+          <p:cNvSpPr>
+            <a:spLocks noGrp="1"/>
+          </p:cNvSpPr>
+          <p:nvPr>
+            <p:ph type="body" idx="1"/>
+          </p:nvPr>
+        </p:nvSpPr>
+        <p:spPr/>
+        <p:txBody>
+          <a:bodyPr/>
+          <a:lstStyle/>
+          <a:p>
+            <a:r>
+              <a:rPr lang="en-US" dirty="0"/>
+              <a:t>最后总结。左边是已达成：Sprint 1 八项目标全部达成、单品单卖闭环实测通过，A.1、A.2 挑战升级已经实现。中间是证据：接口 14 项、升级 12 项、12 张截图、视频和报告。右边是后续要关注的五项，其中多商品版自检脚本优先。一句话：基线已收尾，挑战升级已落地，商品侧和客户侧的每条升级要求都能落到具体用例和截图上。谢谢大家，欢迎提问。</a:t>
+            </a:r>
+            <a:endParaRPr lang="en-US" dirty="0"/>
+          </a:p>
+        </p:txBody>
+      </p:sp>
+      <p:sp>
+        <p:nvSpPr>
+          <p:cNvPr id="4" name="Slide Number Placeholder 3"/>
+          <p:cNvSpPr>
+            <a:spLocks noGrp="1"/>
+          </p:cNvSpPr>
+          <p:nvPr>
+            <p:ph type="sldNum" sz="quarter" idx="10"/>
+          </p:nvPr>
+        </p:nvSpPr>
+        <p:spPr/>
+        <p:txBody>
+          <a:bodyPr/>
+          <a:lstStyle/>
+          <a:p>
+            <a:fld id="{F7021451-1387-4CA6-816F-3879F97B5CBC}" type="slidenum">
+              <a:rPr lang="en-US"/>
+              <a:t>14</a:t>
             </a:fld>
             <a:endParaRPr lang="en-US"/>
           </a:p>
@@ -2968,9 +3057,9 @@
             <a:tbl>
               <a:tblPr/>
               <a:tblGrid>
-                <a:gridCol w="1554480"/>
-                <a:gridCol w="4297680"/>
-                <a:gridCol w="2377440"/>
+                <a:gridCol w="1600200"/>
+                <a:gridCol w="4343400"/>
+                <a:gridCol w="2286000"/>
               </a:tblGrid>
               <a:tr h="365760">
                 <a:tc>
@@ -2982,7 +3071,7 @@
                         <a:buNone/>
                       </a:pPr>
                       <a:r>
-                        <a:rPr lang="en-US" sz="800" b="1" dirty="0">
+                        <a:rPr lang="en-US" sz="850" b="1" dirty="0">
                           <a:solidFill>
                             <a:srgbClr val="FFFFFF"/>
                           </a:solidFill>
@@ -2992,7 +3081,7 @@
                         </a:rPr>
                         <a:t>完成人</a:t>
                       </a:r>
-                      <a:endParaRPr lang="en-US" sz="800" dirty="0">
+                      <a:endParaRPr lang="en-US" sz="850" dirty="0">
                         <a:latin typeface="Microsoft YaHei" charset="0"/>
                         <a:ea typeface="Microsoft YaHei" charset="0"/>
                         <a:cs typeface="Microsoft YaHei" charset="0"/>
@@ -3050,7 +3139,7 @@
                         <a:buNone/>
                       </a:pPr>
                       <a:r>
-                        <a:rPr lang="en-US" sz="800" b="1" dirty="0">
+                        <a:rPr lang="en-US" sz="850" b="1" dirty="0">
                           <a:solidFill>
                             <a:srgbClr val="FFFFFF"/>
                           </a:solidFill>
@@ -3060,7 +3149,7 @@
                         </a:rPr>
                         <a:t>承担工作</a:t>
                       </a:r>
-                      <a:endParaRPr lang="en-US" sz="800" dirty="0">
+                      <a:endParaRPr lang="en-US" sz="850" dirty="0">
                         <a:latin typeface="Microsoft YaHei" charset="0"/>
                         <a:ea typeface="Microsoft YaHei" charset="0"/>
                         <a:cs typeface="Microsoft YaHei" charset="0"/>
@@ -3118,7 +3207,7 @@
                         <a:buNone/>
                       </a:pPr>
                       <a:r>
-                        <a:rPr lang="en-US" sz="800" b="1" dirty="0">
+                        <a:rPr lang="en-US" sz="850" b="1" dirty="0">
                           <a:solidFill>
                             <a:srgbClr val="FFFFFF"/>
                           </a:solidFill>
@@ -3128,7 +3217,7 @@
                         </a:rPr>
                         <a:t>成果物</a:t>
                       </a:r>
-                      <a:endParaRPr lang="en-US" sz="800" dirty="0">
+                      <a:endParaRPr lang="en-US" sz="850" dirty="0">
                         <a:latin typeface="Microsoft YaHei" charset="0"/>
                         <a:ea typeface="Microsoft YaHei" charset="0"/>
                         <a:cs typeface="Microsoft YaHei" charset="0"/>
@@ -3188,7 +3277,7 @@
                         <a:buNone/>
                       </a:pPr>
                       <a:r>
-                        <a:rPr lang="en-US" sz="800" dirty="0">
+                        <a:rPr lang="en-US" sz="850" dirty="0">
                           <a:solidFill>
                             <a:srgbClr val="2B2622"/>
                           </a:solidFill>
@@ -3198,7 +3287,7 @@
                         </a:rPr>
                         <a:t>方浩昱（后端②）</a:t>
                       </a:r>
-                      <a:endParaRPr lang="en-US" sz="800" dirty="0">
+                      <a:endParaRPr lang="en-US" sz="850" dirty="0">
                         <a:latin typeface="Microsoft YaHei" charset="0"/>
                         <a:ea typeface="Microsoft YaHei" charset="0"/>
                         <a:cs typeface="Microsoft YaHei" charset="0"/>
@@ -3256,7 +3345,7 @@
                         <a:buNone/>
                       </a:pPr>
                       <a:r>
-                        <a:rPr lang="en-US" sz="800" dirty="0">
+                        <a:rPr lang="en-US" sz="850" dirty="0">
                           <a:solidFill>
                             <a:srgbClr val="2B2622"/>
                           </a:solidFill>
@@ -3264,9 +3353,9 @@
                           <a:ea typeface="Microsoft YaHei" pitchFamily="34" charset="-122"/>
                           <a:cs typeface="Microsoft YaHei" pitchFamily="34" charset="-120"/>
                         </a:rPr>
-                        <a:t>A.1 商品模型与交易规则：库存/多图/二级分类字段、成交扣库存、归零自动下架、解除单品单卖</a:t>
+                        <a:t>A.1 商品模型与交易规则：库存/多图/二级分类字段、成交扣库存、归零下架、解除单品单卖</a:t>
                       </a:r>
-                      <a:endParaRPr lang="en-US" sz="800" dirty="0">
+                      <a:endParaRPr lang="en-US" sz="850" dirty="0">
                         <a:latin typeface="Microsoft YaHei" charset="0"/>
                         <a:ea typeface="Microsoft YaHei" charset="0"/>
                         <a:cs typeface="Microsoft YaHei" charset="0"/>
@@ -3324,7 +3413,7 @@
                         <a:buNone/>
                       </a:pPr>
                       <a:r>
-                        <a:rPr lang="en-US" sz="800" dirty="0">
+                        <a:rPr lang="en-US" sz="850" dirty="0">
                           <a:solidFill>
                             <a:srgbClr val="2B2622"/>
                           </a:solidFill>
@@ -3334,7 +3423,7 @@
                         </a:rPr>
                         <a:t>Product.java / ProductService.java</a:t>
                       </a:r>
-                      <a:endParaRPr lang="en-US" sz="800" dirty="0">
+                      <a:endParaRPr lang="en-US" sz="850" dirty="0">
                         <a:latin typeface="Microsoft YaHei" charset="0"/>
                         <a:ea typeface="Microsoft YaHei" charset="0"/>
                         <a:cs typeface="Microsoft YaHei" charset="0"/>
@@ -3394,7 +3483,7 @@
                         <a:buNone/>
                       </a:pPr>
                       <a:r>
-                        <a:rPr lang="en-US" sz="800" dirty="0">
+                        <a:rPr lang="en-US" sz="850" dirty="0">
                           <a:solidFill>
                             <a:srgbClr val="2B2622"/>
                           </a:solidFill>
@@ -3404,7 +3493,7 @@
                         </a:rPr>
                         <a:t>王则凯（后端①）</a:t>
                       </a:r>
-                      <a:endParaRPr lang="en-US" sz="800" dirty="0">
+                      <a:endParaRPr lang="en-US" sz="850" dirty="0">
                         <a:latin typeface="Microsoft YaHei" charset="0"/>
                         <a:ea typeface="Microsoft YaHei" charset="0"/>
                         <a:cs typeface="Microsoft YaHei" charset="0"/>
@@ -3462,7 +3551,7 @@
                         <a:buNone/>
                       </a:pPr>
                       <a:r>
-                        <a:rPr lang="en-US" sz="800" dirty="0">
+                        <a:rPr lang="en-US" sz="850" dirty="0">
                           <a:solidFill>
                             <a:srgbClr val="2B2622"/>
                           </a:solidFill>
@@ -3472,7 +3561,7 @@
                         </a:rPr>
                         <a:t>A.1 接口层：商品发布/编辑/搜索、分类树与分类维护</a:t>
                       </a:r>
-                      <a:endParaRPr lang="en-US" sz="800" dirty="0">
+                      <a:endParaRPr lang="en-US" sz="850" dirty="0">
                         <a:latin typeface="Microsoft YaHei" charset="0"/>
                         <a:ea typeface="Microsoft YaHei" charset="0"/>
                         <a:cs typeface="Microsoft YaHei" charset="0"/>
@@ -3530,7 +3619,7 @@
                         <a:buNone/>
                       </a:pPr>
                       <a:r>
-                        <a:rPr lang="en-US" sz="800" dirty="0">
+                        <a:rPr lang="en-US" sz="850" dirty="0">
                           <a:solidFill>
                             <a:srgbClr val="2B2622"/>
                           </a:solidFill>
@@ -3540,7 +3629,7 @@
                         </a:rPr>
                         <a:t>ProductController / CategoryController</a:t>
                       </a:r>
-                      <a:endParaRPr lang="en-US" sz="800" dirty="0">
+                      <a:endParaRPr lang="en-US" sz="850" dirty="0">
                         <a:latin typeface="Microsoft YaHei" charset="0"/>
                         <a:ea typeface="Microsoft YaHei" charset="0"/>
                         <a:cs typeface="Microsoft YaHei" charset="0"/>
@@ -3600,7 +3689,7 @@
                         <a:buNone/>
                       </a:pPr>
                       <a:r>
-                        <a:rPr lang="en-US" sz="800" dirty="0">
+                        <a:rPr lang="en-US" sz="850" dirty="0">
                           <a:solidFill>
                             <a:srgbClr val="2B2622"/>
                           </a:solidFill>
@@ -3610,7 +3699,7 @@
                         </a:rPr>
                         <a:t>方浩昱（后端②）</a:t>
                       </a:r>
-                      <a:endParaRPr lang="en-US" sz="800" dirty="0">
+                      <a:endParaRPr lang="en-US" sz="850" dirty="0">
                         <a:latin typeface="Microsoft YaHei" charset="0"/>
                         <a:ea typeface="Microsoft YaHei" charset="0"/>
                         <a:cs typeface="Microsoft YaHei" charset="0"/>
@@ -3668,7 +3757,7 @@
                         <a:buNone/>
                       </a:pPr>
                       <a:r>
-                        <a:rPr lang="en-US" sz="800" dirty="0">
+                        <a:rPr lang="en-US" sz="850" dirty="0">
                           <a:solidFill>
                             <a:srgbClr val="2B2622"/>
                           </a:solidFill>
@@ -3678,7 +3767,7 @@
                         </a:rPr>
                         <a:t>A.2 客户侧：Customer 实体、注册登录与 token 鉴权、意向关联、历史下单、商家客户视图</a:t>
                       </a:r>
-                      <a:endParaRPr lang="en-US" sz="800" dirty="0">
+                      <a:endParaRPr lang="en-US" sz="850" dirty="0">
                         <a:latin typeface="Microsoft YaHei" charset="0"/>
                         <a:ea typeface="Microsoft YaHei" charset="0"/>
                         <a:cs typeface="Microsoft YaHei" charset="0"/>
@@ -3736,7 +3825,7 @@
                         <a:buNone/>
                       </a:pPr>
                       <a:r>
-                        <a:rPr lang="en-US" sz="800" dirty="0">
+                        <a:rPr lang="en-US" sz="850" dirty="0">
                           <a:solidFill>
                             <a:srgbClr val="2B2622"/>
                           </a:solidFill>
@@ -3746,7 +3835,7 @@
                         </a:rPr>
                         <a:t>Customer 系列 / CustomerInterceptor</a:t>
                       </a:r>
-                      <a:endParaRPr lang="en-US" sz="800" dirty="0">
+                      <a:endParaRPr lang="en-US" sz="850" dirty="0">
                         <a:latin typeface="Microsoft YaHei" charset="0"/>
                         <a:ea typeface="Microsoft YaHei" charset="0"/>
                         <a:cs typeface="Microsoft YaHei" charset="0"/>
@@ -3806,7 +3895,7 @@
                         <a:buNone/>
                       </a:pPr>
                       <a:r>
-                        <a:rPr lang="en-US" sz="800" dirty="0">
+                        <a:rPr lang="en-US" sz="850" dirty="0">
                           <a:solidFill>
                             <a:srgbClr val="2B2622"/>
                           </a:solidFill>
@@ -3816,7 +3905,7 @@
                         </a:rPr>
                         <a:t>丁月诚（前端）</a:t>
                       </a:r>
-                      <a:endParaRPr lang="en-US" sz="800" dirty="0">
+                      <a:endParaRPr lang="en-US" sz="850" dirty="0">
                         <a:latin typeface="Microsoft YaHei" charset="0"/>
                         <a:ea typeface="Microsoft YaHei" charset="0"/>
                         <a:cs typeface="Microsoft YaHei" charset="0"/>
@@ -3874,7 +3963,7 @@
                         <a:buNone/>
                       </a:pPr>
                       <a:r>
-                        <a:rPr lang="en-US" sz="800" dirty="0">
+                        <a:rPr lang="en-US" sz="850" dirty="0">
                           <a:solidFill>
                             <a:srgbClr val="2B2622"/>
                           </a:solidFill>
@@ -3882,9 +3971,9 @@
                           <a:ea typeface="Microsoft YaHei" pitchFamily="34" charset="-122"/>
                           <a:cs typeface="Microsoft YaHei" pitchFamily="34" charset="-120"/>
                         </a:rPr>
-                        <a:t>首页多商品+搜索+分类、详情多图富媒体、客户注册/登录/订单、卖家商品/客户管理</a:t>
+                        <a:t>首页多商品+搜索+分类、详情多图富媒体、客户注册/登录/订单、卖家商品与客户管理</a:t>
                       </a:r>
-                      <a:endParaRPr lang="en-US" sz="800" dirty="0">
+                      <a:endParaRPr lang="en-US" sz="850" dirty="0">
                         <a:latin typeface="Microsoft YaHei" charset="0"/>
                         <a:ea typeface="Microsoft YaHei" charset="0"/>
                         <a:cs typeface="Microsoft YaHei" charset="0"/>
@@ -3942,7 +4031,7 @@
                         <a:buNone/>
                       </a:pPr>
                       <a:r>
-                        <a:rPr lang="en-US" sz="800" dirty="0">
+                        <a:rPr lang="en-US" sz="850" dirty="0">
                           <a:solidFill>
                             <a:srgbClr val="2B2622"/>
                           </a:solidFill>
@@ -3952,7 +4041,7 @@
                         </a:rPr>
                         <a:t>8 个 Vue 页面 / router</a:t>
                       </a:r>
-                      <a:endParaRPr lang="en-US" sz="800" dirty="0">
+                      <a:endParaRPr lang="en-US" sz="850" dirty="0">
                         <a:latin typeface="Microsoft YaHei" charset="0"/>
                         <a:ea typeface="Microsoft YaHei" charset="0"/>
                         <a:cs typeface="Microsoft YaHei" charset="0"/>
@@ -4012,7 +4101,7 @@
                         <a:buNone/>
                       </a:pPr>
                       <a:r>
-                        <a:rPr lang="en-US" sz="800" dirty="0">
+                        <a:rPr lang="en-US" sz="850" dirty="0">
                           <a:solidFill>
                             <a:srgbClr val="2B2622"/>
                           </a:solidFill>
@@ -4022,7 +4111,7 @@
                         </a:rPr>
                         <a:t>方浩昱（测试执行）</a:t>
                       </a:r>
-                      <a:endParaRPr lang="en-US" sz="800" dirty="0">
+                      <a:endParaRPr lang="en-US" sz="850" dirty="0">
                         <a:latin typeface="Microsoft YaHei" charset="0"/>
                         <a:ea typeface="Microsoft YaHei" charset="0"/>
                         <a:cs typeface="Microsoft YaHei" charset="0"/>
@@ -4080,7 +4169,7 @@
                         <a:buNone/>
                       </a:pPr>
                       <a:r>
-                        <a:rPr lang="en-US" sz="800" dirty="0">
+                        <a:rPr lang="en-US" sz="850" dirty="0">
                           <a:solidFill>
                             <a:srgbClr val="2B2622"/>
                           </a:solidFill>
@@ -4088,9 +4177,9 @@
                           <a:ea typeface="Microsoft YaHei" pitchFamily="34" charset="-122"/>
                           <a:cs typeface="Microsoft YaHei" pitchFamily="34" charset="-120"/>
                         </a:rPr>
-                        <a:t>A.1/A.2 用例设计与实测 12 项全过、7 张升级后截图</a:t>
+                        <a:t>A.1/A.2 接口用例 12 项全过、升级截图 7 张；基线复测 14 项、5 张截图</a:t>
                       </a:r>
-                      <a:endParaRPr lang="en-US" sz="800" dirty="0">
+                      <a:endParaRPr lang="en-US" sz="850" dirty="0">
                         <a:latin typeface="Microsoft YaHei" charset="0"/>
                         <a:ea typeface="Microsoft YaHei" charset="0"/>
                         <a:cs typeface="Microsoft YaHei" charset="0"/>
@@ -4148,7 +4237,7 @@
                         <a:buNone/>
                       </a:pPr>
                       <a:r>
-                        <a:rPr lang="en-US" sz="800" dirty="0">
+                        <a:rPr lang="en-US" sz="850" dirty="0">
                           <a:solidFill>
                             <a:srgbClr val="2B2622"/>
                           </a:solidFill>
@@ -4156,9 +4245,9 @@
                           <a:ea typeface="Microsoft YaHei" pitchFamily="34" charset="-122"/>
                           <a:cs typeface="Microsoft YaHei" pitchFamily="34" charset="-120"/>
                         </a:rPr>
-                        <a:t>测试第八章 / screenshots 06~12</a:t>
+                        <a:t>测试第八章 / screenshots 01~12</a:t>
                       </a:r>
-                      <a:endParaRPr lang="en-US" sz="800" dirty="0">
+                      <a:endParaRPr lang="en-US" sz="850" dirty="0">
                         <a:latin typeface="Microsoft YaHei" charset="0"/>
                         <a:ea typeface="Microsoft YaHei" charset="0"/>
                         <a:cs typeface="Microsoft YaHei" charset="0"/>
@@ -4218,7 +4307,7 @@
                         <a:buNone/>
                       </a:pPr>
                       <a:r>
-                        <a:rPr lang="en-US" sz="800" dirty="0">
+                        <a:rPr lang="en-US" sz="850" dirty="0">
                           <a:solidFill>
                             <a:srgbClr val="2B2622"/>
                           </a:solidFill>
@@ -4226,9 +4315,9 @@
                           <a:ea typeface="Microsoft YaHei" pitchFamily="34" charset="-122"/>
                           <a:cs typeface="Microsoft YaHei" pitchFamily="34" charset="-120"/>
                         </a:rPr>
-                        <a:t>何易（文档/组长）</a:t>
+                        <a:t>戴英杰（测试）</a:t>
                       </a:r>
-                      <a:endParaRPr lang="en-US" sz="800" dirty="0">
+                      <a:endParaRPr lang="en-US" sz="850" dirty="0">
                         <a:latin typeface="Microsoft YaHei" charset="0"/>
                         <a:ea typeface="Microsoft YaHei" charset="0"/>
                         <a:cs typeface="Microsoft YaHei" charset="0"/>
@@ -4286,7 +4375,7 @@
                         <a:buNone/>
                       </a:pPr>
                       <a:r>
-                        <a:rPr lang="en-US" sz="800" dirty="0">
+                        <a:rPr lang="en-US" sz="850" dirty="0">
                           <a:solidFill>
                             <a:srgbClr val="2B2622"/>
                           </a:solidFill>
@@ -4294,9 +4383,9 @@
                           <a:ea typeface="Microsoft YaHei" pitchFamily="34" charset="-122"/>
                           <a:cs typeface="Microsoft YaHei" pitchFamily="34" charset="-120"/>
                         </a:rPr>
-                        <a:t>A.1/A.2 需求登记与状态更新，报告与 PPT 同步「已实现」</a:t>
+                        <a:t>A.1/A.2 升级后界面走查与端到端验证；Sprint 1 主流程与规则约束验证</a:t>
                       </a:r>
-                      <a:endParaRPr lang="en-US" sz="800" dirty="0">
+                      <a:endParaRPr lang="en-US" sz="850" dirty="0">
                         <a:latin typeface="Microsoft YaHei" charset="0"/>
                         <a:ea typeface="Microsoft YaHei" charset="0"/>
                         <a:cs typeface="Microsoft YaHei" charset="0"/>
@@ -4354,7 +4443,7 @@
                         <a:buNone/>
                       </a:pPr>
                       <a:r>
-                        <a:rPr lang="en-US" sz="800" dirty="0">
+                        <a:rPr lang="en-US" sz="850" dirty="0">
                           <a:solidFill>
                             <a:srgbClr val="2B2622"/>
                           </a:solidFill>
@@ -4362,9 +4451,9 @@
                           <a:ea typeface="Microsoft YaHei" pitchFamily="34" charset="-122"/>
                           <a:cs typeface="Microsoft YaHei" pitchFamily="34" charset="-120"/>
                         </a:rPr>
-                        <a:t>本报告 / 讲述版 PPT</a:t>
+                        <a:t>端到端验证记录 / 本报告</a:t>
                       </a:r>
-                      <a:endParaRPr lang="en-US" sz="800" dirty="0">
+                      <a:endParaRPr lang="en-US" sz="850" dirty="0">
                         <a:latin typeface="Microsoft YaHei" charset="0"/>
                         <a:ea typeface="Microsoft YaHei" charset="0"/>
                         <a:cs typeface="Microsoft YaHei" charset="0"/>
@@ -4424,7 +4513,7 @@
                         <a:buNone/>
                       </a:pPr>
                       <a:r>
-                        <a:rPr lang="en-US" sz="800" dirty="0">
+                        <a:rPr lang="en-US" sz="850" dirty="0">
                           <a:solidFill>
                             <a:srgbClr val="2B2622"/>
                           </a:solidFill>
@@ -4432,9 +4521,9 @@
                           <a:ea typeface="Microsoft YaHei" pitchFamily="34" charset="-122"/>
                           <a:cs typeface="Microsoft YaHei" pitchFamily="34" charset="-120"/>
                         </a:rPr>
-                        <a:t>方浩昱（测试执行）</a:t>
+                        <a:t>何易（文档/组长）</a:t>
                       </a:r>
-                      <a:endParaRPr lang="en-US" sz="800" dirty="0">
+                      <a:endParaRPr lang="en-US" sz="850" dirty="0">
                         <a:latin typeface="Microsoft YaHei" charset="0"/>
                         <a:ea typeface="Microsoft YaHei" charset="0"/>
                         <a:cs typeface="Microsoft YaHei" charset="0"/>
@@ -4492,7 +4581,7 @@
                         <a:buNone/>
                       </a:pPr>
                       <a:r>
-                        <a:rPr lang="en-US" sz="800" dirty="0">
+                        <a:rPr lang="en-US" sz="850" dirty="0">
                           <a:solidFill>
                             <a:srgbClr val="2B2622"/>
                           </a:solidFill>
@@ -4500,9 +4589,9 @@
                           <a:ea typeface="Microsoft YaHei" pitchFamily="34" charset="-122"/>
                           <a:cs typeface="Microsoft YaHei" pitchFamily="34" charset="-120"/>
                         </a:rPr>
-                        <a:t>Sprint 1 基线复测：接口 14 项全过、5 张基线截图</a:t>
+                        <a:t>需求条目登记、报告与讲述版 PPT、测试说明同步、Wiki 发布</a:t>
                       </a:r>
-                      <a:endParaRPr lang="en-US" sz="800" dirty="0">
+                      <a:endParaRPr lang="en-US" sz="850" dirty="0">
                         <a:latin typeface="Microsoft YaHei" charset="0"/>
                         <a:ea typeface="Microsoft YaHei" charset="0"/>
                         <a:cs typeface="Microsoft YaHei" charset="0"/>
@@ -4560,7 +4649,7 @@
                         <a:buNone/>
                       </a:pPr>
                       <a:r>
-                        <a:rPr lang="en-US" sz="800" dirty="0">
+                        <a:rPr lang="en-US" sz="850" dirty="0">
                           <a:solidFill>
                             <a:srgbClr val="2B2622"/>
                           </a:solidFill>
@@ -4568,215 +4657,9 @@
                           <a:ea typeface="Microsoft YaHei" pitchFamily="34" charset="-122"/>
                           <a:cs typeface="Microsoft YaHei" pitchFamily="34" charset="-120"/>
                         </a:rPr>
-                        <a:t>本报告第三章 / screenshots 01~05</a:t>
+                        <a:t>本报告 / 14 页 PPT</a:t>
                       </a:r>
-                      <a:endParaRPr lang="en-US" sz="800" dirty="0">
-                        <a:latin typeface="Microsoft YaHei" charset="0"/>
-                        <a:ea typeface="Microsoft YaHei" charset="0"/>
-                        <a:cs typeface="Microsoft YaHei" charset="0"/>
-                      </a:endParaRPr>
-                    </a:p>
-                  </a:txBody>
-                  <a:tcPr marL="91440" marR="91440" marT="45720" marB="45720" anchor="ctr">
-                    <a:lnL w="6350" cap="flat" cmpd="sng" algn="ctr">
-                      <a:solidFill>
-                        <a:srgbClr val="DDD6CC"/>
-                      </a:solidFill>
-                      <a:prstDash val="solid"/>
-                      <a:round/>
-                      <a:headEnd type="none" w="med" len="med"/>
-                      <a:tailEnd type="none" w="med" len="med"/>
-                    </a:lnL>
-                    <a:lnR w="6350" cap="flat" cmpd="sng" algn="ctr">
-                      <a:solidFill>
-                        <a:srgbClr val="DDD6CC"/>
-                      </a:solidFill>
-                      <a:prstDash val="solid"/>
-                      <a:round/>
-                      <a:headEnd type="none" w="med" len="med"/>
-                      <a:tailEnd type="none" w="med" len="med"/>
-                    </a:lnR>
-                    <a:lnT w="6350" cap="flat" cmpd="sng" algn="ctr">
-                      <a:solidFill>
-                        <a:srgbClr val="DDD6CC"/>
-                      </a:solidFill>
-                      <a:prstDash val="solid"/>
-                      <a:round/>
-                      <a:headEnd type="none" w="med" len="med"/>
-                      <a:tailEnd type="none" w="med" len="med"/>
-                    </a:lnT>
-                    <a:lnB w="6350" cap="flat" cmpd="sng" algn="ctr">
-                      <a:solidFill>
-                        <a:srgbClr val="DDD6CC"/>
-                      </a:solidFill>
-                      <a:prstDash val="solid"/>
-                      <a:round/>
-                      <a:headEnd type="none" w="med" len="med"/>
-                      <a:tailEnd type="none" w="med" len="med"/>
-                    </a:lnB>
-                    <a:solidFill>
-                      <a:srgbClr val="FFFFFF"/>
-                    </a:solidFill>
-                  </a:tcPr>
-                </a:tc>
-              </a:tr>
-              <a:tr h="365760">
-                <a:tc>
-                  <a:txBody>
-                    <a:bodyPr/>
-                    <a:lstStyle/>
-                    <a:p>
-                      <a:pPr indent="0" marL="0">
-                        <a:buNone/>
-                      </a:pPr>
-                      <a:r>
-                        <a:rPr lang="en-US" sz="800" dirty="0">
-                          <a:solidFill>
-                            <a:srgbClr val="2B2622"/>
-                          </a:solidFill>
-                          <a:latin typeface="Microsoft YaHei" pitchFamily="34" charset="0"/>
-                          <a:ea typeface="Microsoft YaHei" pitchFamily="34" charset="-122"/>
-                          <a:cs typeface="Microsoft YaHei" pitchFamily="34" charset="-120"/>
-                        </a:rPr>
-                        <a:t>何易（文档/组长）</a:t>
-                      </a:r>
-                      <a:endParaRPr lang="en-US" sz="800" dirty="0">
-                        <a:latin typeface="Microsoft YaHei" charset="0"/>
-                        <a:ea typeface="Microsoft YaHei" charset="0"/>
-                        <a:cs typeface="Microsoft YaHei" charset="0"/>
-                      </a:endParaRPr>
-                    </a:p>
-                  </a:txBody>
-                  <a:tcPr marL="91440" marR="91440" marT="45720" marB="45720" anchor="ctr">
-                    <a:lnL w="6350" cap="flat" cmpd="sng" algn="ctr">
-                      <a:solidFill>
-                        <a:srgbClr val="DDD6CC"/>
-                      </a:solidFill>
-                      <a:prstDash val="solid"/>
-                      <a:round/>
-                      <a:headEnd type="none" w="med" len="med"/>
-                      <a:tailEnd type="none" w="med" len="med"/>
-                    </a:lnL>
-                    <a:lnR w="6350" cap="flat" cmpd="sng" algn="ctr">
-                      <a:solidFill>
-                        <a:srgbClr val="DDD6CC"/>
-                      </a:solidFill>
-                      <a:prstDash val="solid"/>
-                      <a:round/>
-                      <a:headEnd type="none" w="med" len="med"/>
-                      <a:tailEnd type="none" w="med" len="med"/>
-                    </a:lnR>
-                    <a:lnT w="6350" cap="flat" cmpd="sng" algn="ctr">
-                      <a:solidFill>
-                        <a:srgbClr val="DDD6CC"/>
-                      </a:solidFill>
-                      <a:prstDash val="solid"/>
-                      <a:round/>
-                      <a:headEnd type="none" w="med" len="med"/>
-                      <a:tailEnd type="none" w="med" len="med"/>
-                    </a:lnT>
-                    <a:lnB w="6350" cap="flat" cmpd="sng" algn="ctr">
-                      <a:solidFill>
-                        <a:srgbClr val="DDD6CC"/>
-                      </a:solidFill>
-                      <a:prstDash val="solid"/>
-                      <a:round/>
-                      <a:headEnd type="none" w="med" len="med"/>
-                      <a:tailEnd type="none" w="med" len="med"/>
-                    </a:lnB>
-                    <a:solidFill>
-                      <a:srgbClr val="FFFFFF"/>
-                    </a:solidFill>
-                  </a:tcPr>
-                </a:tc>
-                <a:tc>
-                  <a:txBody>
-                    <a:bodyPr/>
-                    <a:lstStyle/>
-                    <a:p>
-                      <a:pPr indent="0" marL="0">
-                        <a:buNone/>
-                      </a:pPr>
-                      <a:r>
-                        <a:rPr lang="en-US" sz="800" dirty="0">
-                          <a:solidFill>
-                            <a:srgbClr val="2B2622"/>
-                          </a:solidFill>
-                          <a:latin typeface="Microsoft YaHei" pitchFamily="34" charset="0"/>
-                          <a:ea typeface="Microsoft YaHei" pitchFamily="34" charset="-122"/>
-                          <a:cs typeface="Microsoft YaHei" pitchFamily="34" charset="-120"/>
-                        </a:rPr>
-                        <a:t>测试说明新增界面截图章节，整理第二次评审报告</a:t>
-                      </a:r>
-                      <a:endParaRPr lang="en-US" sz="800" dirty="0">
-                        <a:latin typeface="Microsoft YaHei" charset="0"/>
-                        <a:ea typeface="Microsoft YaHei" charset="0"/>
-                        <a:cs typeface="Microsoft YaHei" charset="0"/>
-                      </a:endParaRPr>
-                    </a:p>
-                  </a:txBody>
-                  <a:tcPr marL="91440" marR="91440" marT="45720" marB="45720" anchor="ctr">
-                    <a:lnL w="6350" cap="flat" cmpd="sng" algn="ctr">
-                      <a:solidFill>
-                        <a:srgbClr val="DDD6CC"/>
-                      </a:solidFill>
-                      <a:prstDash val="solid"/>
-                      <a:round/>
-                      <a:headEnd type="none" w="med" len="med"/>
-                      <a:tailEnd type="none" w="med" len="med"/>
-                    </a:lnL>
-                    <a:lnR w="6350" cap="flat" cmpd="sng" algn="ctr">
-                      <a:solidFill>
-                        <a:srgbClr val="DDD6CC"/>
-                      </a:solidFill>
-                      <a:prstDash val="solid"/>
-                      <a:round/>
-                      <a:headEnd type="none" w="med" len="med"/>
-                      <a:tailEnd type="none" w="med" len="med"/>
-                    </a:lnR>
-                    <a:lnT w="6350" cap="flat" cmpd="sng" algn="ctr">
-                      <a:solidFill>
-                        <a:srgbClr val="DDD6CC"/>
-                      </a:solidFill>
-                      <a:prstDash val="solid"/>
-                      <a:round/>
-                      <a:headEnd type="none" w="med" len="med"/>
-                      <a:tailEnd type="none" w="med" len="med"/>
-                    </a:lnT>
-                    <a:lnB w="6350" cap="flat" cmpd="sng" algn="ctr">
-                      <a:solidFill>
-                        <a:srgbClr val="DDD6CC"/>
-                      </a:solidFill>
-                      <a:prstDash val="solid"/>
-                      <a:round/>
-                      <a:headEnd type="none" w="med" len="med"/>
-                      <a:tailEnd type="none" w="med" len="med"/>
-                    </a:lnB>
-                    <a:solidFill>
-                      <a:srgbClr val="FFFFFF"/>
-                    </a:solidFill>
-                  </a:tcPr>
-                </a:tc>
-                <a:tc>
-                  <a:txBody>
-                    <a:bodyPr/>
-                    <a:lstStyle/>
-                    <a:p>
-                      <a:pPr indent="0" marL="0">
-                        <a:buNone/>
-                      </a:pPr>
-                      <a:r>
-                        <a:rPr lang="en-US" sz="800" dirty="0">
-                          <a:solidFill>
-                            <a:srgbClr val="2B2622"/>
-                          </a:solidFill>
-                          <a:latin typeface="Microsoft YaHei" pitchFamily="34" charset="0"/>
-                          <a:ea typeface="Microsoft YaHei" pitchFamily="34" charset="-122"/>
-                          <a:cs typeface="Microsoft YaHei" pitchFamily="34" charset="-120"/>
-                        </a:rPr>
-                        <a:t>测试用例第六章 / 本报告</a:t>
-                      </a:r>
-                      <a:endParaRPr lang="en-US" sz="800" dirty="0">
+                      <a:endParaRPr lang="en-US" sz="850" dirty="0">
                         <a:latin typeface="Microsoft YaHei" charset="0"/>
                         <a:ea typeface="Microsoft YaHei" charset="0"/>
                         <a:cs typeface="Microsoft YaHei" charset="0"/>
@@ -4838,8 +4721,8 @@
         </p:nvSpPr>
         <p:spPr>
           <a:xfrm>
-            <a:off x="457200" y="4434840"/>
-            <a:ext cx="8229600" cy="411480"/>
+            <a:off x="457200" y="4315968"/>
+            <a:ext cx="8229600" cy="384048"/>
           </a:xfrm>
           <a:prstGeom prst="rect">
             <a:avLst/>
@@ -4858,8 +4741,8 @@
         </p:nvSpPr>
         <p:spPr>
           <a:xfrm>
-            <a:off x="658368" y="4434840"/>
-            <a:ext cx="7863840" cy="411480"/>
+            <a:off x="658368" y="4315968"/>
+            <a:ext cx="7863840" cy="384048"/>
           </a:xfrm>
           <a:prstGeom prst="rect">
             <a:avLst/>
@@ -4883,7 +4766,7 @@
                 <a:ea typeface="Microsoft YaHei" pitchFamily="34" charset="-122"/>
                 <a:cs typeface="Microsoft YaHei" pitchFamily="34" charset="-120"/>
               </a:rPr>
-              <a:t>口径：A.1/A.2 代码于 2026-10-22 合并在提交 4f2fde7 中（便于统一联调），上表按模块归属列示。</a:t>
+              <a:t>口径：A.1/A.2 代码于 2026-10-22 合并在提交 4f2fde7 中（便于统一联调），上表按模块归属列示；下一节按人给出具体工作与界面成果。</a:t>
             </a:r>
             <a:endParaRPr lang="en-US" sz="850" dirty="0"/>
           </a:p>
@@ -4975,6 +4858,1446 @@
             <a:avLst/>
           </a:prstGeom>
           <a:solidFill>
+            <a:srgbClr val="6B8E7B"/>
+          </a:solidFill>
+          <a:ln/>
+        </p:spPr>
+      </p:sp>
+      <p:sp>
+        <p:nvSpPr>
+          <p:cNvPr id="3" name="Text 1"/>
+          <p:cNvSpPr/>
+          <p:nvPr/>
+        </p:nvSpPr>
+        <p:spPr>
+          <a:xfrm>
+            <a:off x="457200" y="237744"/>
+            <a:ext cx="8229600" cy="420624"/>
+          </a:xfrm>
+          <a:prstGeom prst="rect">
+            <a:avLst/>
+          </a:prstGeom>
+          <a:noFill/>
+          <a:ln/>
+        </p:spPr>
+        <p:txBody>
+          <a:bodyPr wrap="square" lIns="0" tIns="0" rIns="0" bIns="0" rtlCol="0" anchor="ctr"/>
+          <a:lstStyle/>
+          <a:p>
+            <a:pPr indent="0" marL="0">
+              <a:buNone/>
+            </a:pPr>
+            <a:r>
+              <a:rPr lang="en-US" sz="2200" b="1" dirty="0">
+                <a:solidFill>
+                  <a:srgbClr val="2B2622"/>
+                </a:solidFill>
+                <a:latin typeface="Microsoft YaHei" pitchFamily="34" charset="0"/>
+                <a:ea typeface="Microsoft YaHei" pitchFamily="34" charset="-122"/>
+                <a:cs typeface="Microsoft YaHei" pitchFamily="34" charset="-120"/>
+              </a:rPr>
+              <a:t>分工到人 · 每人具体工作与界面成果</a:t>
+            </a:r>
+            <a:endParaRPr lang="en-US" sz="2200" dirty="0"/>
+          </a:p>
+        </p:txBody>
+      </p:sp>
+      <p:sp>
+        <p:nvSpPr>
+          <p:cNvPr id="4" name="Text 2"/>
+          <p:cNvSpPr/>
+          <p:nvPr/>
+        </p:nvSpPr>
+        <p:spPr>
+          <a:xfrm>
+            <a:off x="457200" y="694944"/>
+            <a:ext cx="8229600" cy="274320"/>
+          </a:xfrm>
+          <a:prstGeom prst="rect">
+            <a:avLst/>
+          </a:prstGeom>
+          <a:noFill/>
+          <a:ln/>
+        </p:spPr>
+        <p:txBody>
+          <a:bodyPr wrap="square" lIns="0" tIns="0" rIns="0" bIns="0" rtlCol="0" anchor="ctr"/>
+          <a:lstStyle/>
+          <a:p>
+            <a:pPr indent="0" marL="0">
+              <a:buNone/>
+            </a:pPr>
+            <a:r>
+              <a:rPr lang="en-US" sz="1100" dirty="0">
+                <a:solidFill>
+                  <a:srgbClr val="8A8178"/>
+                </a:solidFill>
+                <a:latin typeface="Microsoft YaHei" pitchFamily="34" charset="0"/>
+                <a:ea typeface="Microsoft YaHei" pitchFamily="34" charset="-122"/>
+                <a:cs typeface="Microsoft YaHei" pitchFamily="34" charset="-120"/>
+              </a:rPr>
+              <a:t>5 名成员各自承担的实现 / 验证范围，配对应模块界面实拍（A.1/A.2 升级 + Sprint 1 基线）</a:t>
+            </a:r>
+            <a:endParaRPr lang="en-US" sz="1100" dirty="0"/>
+          </a:p>
+        </p:txBody>
+      </p:sp>
+      <p:sp>
+        <p:nvSpPr>
+          <p:cNvPr id="5" name="Shape 3"/>
+          <p:cNvSpPr/>
+          <p:nvPr/>
+        </p:nvSpPr>
+        <p:spPr>
+          <a:xfrm>
+            <a:off x="457200" y="1005840"/>
+            <a:ext cx="2651760" cy="1783080"/>
+          </a:xfrm>
+          <a:prstGeom prst="rect">
+            <a:avLst/>
+          </a:prstGeom>
+          <a:solidFill>
+            <a:srgbClr val="FFFFFF"/>
+          </a:solidFill>
+          <a:ln w="9525">
+            <a:solidFill>
+              <a:srgbClr val="E3DDD4"/>
+            </a:solidFill>
+            <a:prstDash val="solid"/>
+          </a:ln>
+          <a:effectLst>
+            <a:outerShdw sx="100000" sy="100000" kx="0" ky="0" algn="bl" rotWithShape="0" blurRad="101600" dist="25400" dir="8100000">
+              <a:srgbClr val="000000">
+                <a:alpha val="10000"/>
+              </a:srgbClr>
+            </a:outerShdw>
+          </a:effectLst>
+        </p:spPr>
+      </p:sp>
+      <p:sp>
+        <p:nvSpPr>
+          <p:cNvPr id="6" name="Shape 4"/>
+          <p:cNvSpPr/>
+          <p:nvPr/>
+        </p:nvSpPr>
+        <p:spPr>
+          <a:xfrm>
+            <a:off x="457200" y="1005840"/>
+            <a:ext cx="2651760" cy="45720"/>
+          </a:xfrm>
+          <a:prstGeom prst="rect">
+            <a:avLst/>
+          </a:prstGeom>
+          <a:solidFill>
+            <a:srgbClr val="B85042"/>
+          </a:solidFill>
+          <a:ln/>
+        </p:spPr>
+      </p:sp>
+      <p:pic>
+        <p:nvPicPr>
+          <p:cNvPr id="7" name="Image 0" descr="C:\Users\yuanx\CodeBuddy\20260922075003\docs\wiki\screenshots\06-home-multi.png">    </p:cNvPr>
+          <p:cNvPicPr>
+            <a:picLocks noChangeAspect="1"/>
+          </p:cNvPicPr>
+          <p:nvPr/>
+        </p:nvPicPr>
+        <p:blipFill>
+          <a:blip r:embed="rId1"/>
+          <a:srcRect l="0" r="0" t="0" b="0"/>
+          <a:stretch/>
+        </p:blipFill>
+        <p:spPr>
+          <a:xfrm>
+            <a:off x="548640" y="1115568"/>
+            <a:ext cx="2468880" cy="868680"/>
+          </a:xfrm>
+          <a:prstGeom prst="rect">
+            <a:avLst/>
+          </a:prstGeom>
+        </p:spPr>
+      </p:pic>
+      <p:sp>
+        <p:nvSpPr>
+          <p:cNvPr id="8" name="Text 5"/>
+          <p:cNvSpPr/>
+          <p:nvPr/>
+        </p:nvSpPr>
+        <p:spPr>
+          <a:xfrm>
+            <a:off x="566928" y="1938528"/>
+            <a:ext cx="2468880" cy="219456"/>
+          </a:xfrm>
+          <a:prstGeom prst="rect">
+            <a:avLst/>
+          </a:prstGeom>
+          <a:noFill/>
+          <a:ln/>
+        </p:spPr>
+        <p:txBody>
+          <a:bodyPr wrap="square" lIns="0" tIns="0" rIns="0" bIns="0" rtlCol="0" anchor="ctr"/>
+          <a:lstStyle/>
+          <a:p>
+            <a:pPr indent="0" marL="0">
+              <a:buNone/>
+            </a:pPr>
+            <a:r>
+              <a:rPr lang="en-US" sz="1100" b="1" dirty="0">
+                <a:solidFill>
+                  <a:srgbClr val="2B2622"/>
+                </a:solidFill>
+                <a:latin typeface="Microsoft YaHei" pitchFamily="34" charset="0"/>
+                <a:ea typeface="Microsoft YaHei" pitchFamily="34" charset="-122"/>
+                <a:cs typeface="Microsoft YaHei" pitchFamily="34" charset="-120"/>
+              </a:rPr>
+              <a:t>丁月诚</a:t>
+            </a:r>
+            <a:pPr indent="0" marL="0">
+              <a:buNone/>
+            </a:pPr>
+            <a:r>
+              <a:rPr lang="en-US" sz="800" dirty="0">
+                <a:solidFill>
+                  <a:srgbClr val="8A8178"/>
+                </a:solidFill>
+                <a:latin typeface="Microsoft YaHei" pitchFamily="34" charset="0"/>
+                <a:ea typeface="Microsoft YaHei" pitchFamily="34" charset="-122"/>
+                <a:cs typeface="Microsoft YaHei" pitchFamily="34" charset="-120"/>
+              </a:rPr>
+              <a:t>  前端</a:t>
+            </a:r>
+            <a:endParaRPr lang="en-US" sz="1100" dirty="0"/>
+          </a:p>
+        </p:txBody>
+      </p:sp>
+      <p:sp>
+        <p:nvSpPr>
+          <p:cNvPr id="9" name="Text 6"/>
+          <p:cNvSpPr/>
+          <p:nvPr/>
+        </p:nvSpPr>
+        <p:spPr>
+          <a:xfrm>
+            <a:off x="566928" y="2157984"/>
+            <a:ext cx="2468880" cy="576072"/>
+          </a:xfrm>
+          <a:prstGeom prst="rect">
+            <a:avLst/>
+          </a:prstGeom>
+          <a:noFill/>
+          <a:ln/>
+        </p:spPr>
+        <p:txBody>
+          <a:bodyPr wrap="square" lIns="0" tIns="0" rIns="0" bIns="0" rtlCol="0" anchor="t"/>
+          <a:lstStyle/>
+          <a:p>
+            <a:pPr marL="342900" indent="-342900">
+              <a:lnSpc>
+                <a:spcPct val="100000"/>
+              </a:lnSpc>
+              <a:spcAft>
+                <a:spcPts val="200"/>
+              </a:spcAft>
+              <a:buSzPct val="100000"/>
+              <a:buChar char="•"/>
+            </a:pPr>
+            <a:r>
+              <a:rPr lang="en-US" sz="780" dirty="0">
+                <a:solidFill>
+                  <a:srgbClr val="4A423C"/>
+                </a:solidFill>
+                <a:latin typeface="Microsoft YaHei" pitchFamily="34" charset="0"/>
+                <a:ea typeface="Microsoft YaHei" pitchFamily="34" charset="-122"/>
+                <a:cs typeface="Microsoft YaHei" pitchFamily="34" charset="-120"/>
+              </a:rPr>
+              <a:t>首页多商品列表 + 关键词搜索</a:t>
+            </a:r>
+            <a:endParaRPr lang="en-US" sz="780" dirty="0"/>
+          </a:p>
+          <a:p>
+            <a:pPr marL="342900" indent="-342900">
+              <a:lnSpc>
+                <a:spcPct val="100000"/>
+              </a:lnSpc>
+              <a:spcAft>
+                <a:spcPts val="200"/>
+              </a:spcAft>
+              <a:buSzPct val="100000"/>
+              <a:buChar char="•"/>
+            </a:pPr>
+            <a:r>
+              <a:rPr lang="en-US" sz="780" dirty="0">
+                <a:solidFill>
+                  <a:srgbClr val="4A423C"/>
+                </a:solidFill>
+                <a:latin typeface="Microsoft YaHei" pitchFamily="34" charset="0"/>
+                <a:ea typeface="Microsoft YaHei" pitchFamily="34" charset="-122"/>
+                <a:cs typeface="Microsoft YaHei" pitchFamily="34" charset="-120"/>
+              </a:rPr>
+              <a:t>两级分类筛选、详情多图富媒体</a:t>
+            </a:r>
+            <a:endParaRPr lang="en-US" sz="780" dirty="0"/>
+          </a:p>
+          <a:p>
+            <a:pPr marL="342900" indent="-342900">
+              <a:lnSpc>
+                <a:spcPct val="100000"/>
+              </a:lnSpc>
+              <a:spcAft>
+                <a:spcPts val="200"/>
+              </a:spcAft>
+              <a:buSzPct val="100000"/>
+              <a:buChar char="•"/>
+            </a:pPr>
+            <a:r>
+              <a:rPr lang="en-US" sz="780" dirty="0">
+                <a:solidFill>
+                  <a:srgbClr val="4A423C"/>
+                </a:solidFill>
+                <a:latin typeface="Microsoft YaHei" pitchFamily="34" charset="0"/>
+                <a:ea typeface="Microsoft YaHei" pitchFamily="34" charset="-122"/>
+                <a:cs typeface="Microsoft YaHei" pitchFamily="34" charset="-120"/>
+              </a:rPr>
+              <a:t>客户注册/登录/订单、卖家管理页</a:t>
+            </a:r>
+            <a:endParaRPr lang="en-US" sz="780" dirty="0"/>
+          </a:p>
+        </p:txBody>
+      </p:sp>
+      <p:sp>
+        <p:nvSpPr>
+          <p:cNvPr id="10" name="Shape 7"/>
+          <p:cNvSpPr/>
+          <p:nvPr/>
+        </p:nvSpPr>
+        <p:spPr>
+          <a:xfrm>
+            <a:off x="3246120" y="1005840"/>
+            <a:ext cx="2651760" cy="1783080"/>
+          </a:xfrm>
+          <a:prstGeom prst="rect">
+            <a:avLst/>
+          </a:prstGeom>
+          <a:solidFill>
+            <a:srgbClr val="FFFFFF"/>
+          </a:solidFill>
+          <a:ln w="9525">
+            <a:solidFill>
+              <a:srgbClr val="E3DDD4"/>
+            </a:solidFill>
+            <a:prstDash val="solid"/>
+          </a:ln>
+          <a:effectLst>
+            <a:outerShdw sx="100000" sy="100000" kx="0" ky="0" algn="bl" rotWithShape="0" blurRad="101600" dist="25400" dir="8100000">
+              <a:srgbClr val="000000">
+                <a:alpha val="10000"/>
+              </a:srgbClr>
+            </a:outerShdw>
+          </a:effectLst>
+        </p:spPr>
+      </p:sp>
+      <p:sp>
+        <p:nvSpPr>
+          <p:cNvPr id="11" name="Shape 8"/>
+          <p:cNvSpPr/>
+          <p:nvPr/>
+        </p:nvSpPr>
+        <p:spPr>
+          <a:xfrm>
+            <a:off x="3246120" y="1005840"/>
+            <a:ext cx="2651760" cy="45720"/>
+          </a:xfrm>
+          <a:prstGeom prst="rect">
+            <a:avLst/>
+          </a:prstGeom>
+          <a:solidFill>
+            <a:srgbClr val="4F7160"/>
+          </a:solidFill>
+          <a:ln/>
+        </p:spPr>
+      </p:sp>
+      <p:pic>
+        <p:nvPicPr>
+          <p:cNvPr id="12" name="Image 1" descr="C:\Users\yuanx\CodeBuddy\20260922075003\docs\wiki\screenshots\07-product-detail.png">    </p:cNvPr>
+          <p:cNvPicPr>
+            <a:picLocks noChangeAspect="1"/>
+          </p:cNvPicPr>
+          <p:nvPr/>
+        </p:nvPicPr>
+        <p:blipFill>
+          <a:blip r:embed="rId2"/>
+          <a:srcRect l="0" r="0" t="0" b="0"/>
+          <a:stretch/>
+        </p:blipFill>
+        <p:spPr>
+          <a:xfrm>
+            <a:off x="3337560" y="1115568"/>
+            <a:ext cx="2468880" cy="868680"/>
+          </a:xfrm>
+          <a:prstGeom prst="rect">
+            <a:avLst/>
+          </a:prstGeom>
+        </p:spPr>
+      </p:pic>
+      <p:sp>
+        <p:nvSpPr>
+          <p:cNvPr id="13" name="Text 9"/>
+          <p:cNvSpPr/>
+          <p:nvPr/>
+        </p:nvSpPr>
+        <p:spPr>
+          <a:xfrm>
+            <a:off x="3355848" y="1938528"/>
+            <a:ext cx="2468880" cy="219456"/>
+          </a:xfrm>
+          <a:prstGeom prst="rect">
+            <a:avLst/>
+          </a:prstGeom>
+          <a:noFill/>
+          <a:ln/>
+        </p:spPr>
+        <p:txBody>
+          <a:bodyPr wrap="square" lIns="0" tIns="0" rIns="0" bIns="0" rtlCol="0" anchor="ctr"/>
+          <a:lstStyle/>
+          <a:p>
+            <a:pPr indent="0" marL="0">
+              <a:buNone/>
+            </a:pPr>
+            <a:r>
+              <a:rPr lang="en-US" sz="1100" b="1" dirty="0">
+                <a:solidFill>
+                  <a:srgbClr val="2B2622"/>
+                </a:solidFill>
+                <a:latin typeface="Microsoft YaHei" pitchFamily="34" charset="0"/>
+                <a:ea typeface="Microsoft YaHei" pitchFamily="34" charset="-122"/>
+                <a:cs typeface="Microsoft YaHei" pitchFamily="34" charset="-120"/>
+              </a:rPr>
+              <a:t>方浩昱</a:t>
+            </a:r>
+            <a:pPr indent="0" marL="0">
+              <a:buNone/>
+            </a:pPr>
+            <a:r>
+              <a:rPr lang="en-US" sz="800" dirty="0">
+                <a:solidFill>
+                  <a:srgbClr val="8A8178"/>
+                </a:solidFill>
+                <a:latin typeface="Microsoft YaHei" pitchFamily="34" charset="0"/>
+                <a:ea typeface="Microsoft YaHei" pitchFamily="34" charset="-122"/>
+                <a:cs typeface="Microsoft YaHei" pitchFamily="34" charset="-120"/>
+              </a:rPr>
+              <a:t>  后端②</a:t>
+            </a:r>
+            <a:endParaRPr lang="en-US" sz="1100" dirty="0"/>
+          </a:p>
+        </p:txBody>
+      </p:sp>
+      <p:sp>
+        <p:nvSpPr>
+          <p:cNvPr id="14" name="Text 10"/>
+          <p:cNvSpPr/>
+          <p:nvPr/>
+        </p:nvSpPr>
+        <p:spPr>
+          <a:xfrm>
+            <a:off x="3355848" y="2157984"/>
+            <a:ext cx="2468880" cy="576072"/>
+          </a:xfrm>
+          <a:prstGeom prst="rect">
+            <a:avLst/>
+          </a:prstGeom>
+          <a:noFill/>
+          <a:ln/>
+        </p:spPr>
+        <p:txBody>
+          <a:bodyPr wrap="square" lIns="0" tIns="0" rIns="0" bIns="0" rtlCol="0" anchor="t"/>
+          <a:lstStyle/>
+          <a:p>
+            <a:pPr marL="342900" indent="-342900">
+              <a:lnSpc>
+                <a:spcPct val="100000"/>
+              </a:lnSpc>
+              <a:spcAft>
+                <a:spcPts val="200"/>
+              </a:spcAft>
+              <a:buSzPct val="100000"/>
+              <a:buChar char="•"/>
+            </a:pPr>
+            <a:r>
+              <a:rPr lang="en-US" sz="780" dirty="0">
+                <a:solidFill>
+                  <a:srgbClr val="4A423C"/>
+                </a:solidFill>
+                <a:latin typeface="Microsoft YaHei" pitchFamily="34" charset="0"/>
+                <a:ea typeface="Microsoft YaHei" pitchFamily="34" charset="-122"/>
+                <a:cs typeface="Microsoft YaHei" pitchFamily="34" charset="-120"/>
+              </a:rPr>
+              <a:t>商品模型：库存 / 多图 / 两级分类</a:t>
+            </a:r>
+            <a:endParaRPr lang="en-US" sz="780" dirty="0"/>
+          </a:p>
+          <a:p>
+            <a:pPr marL="342900" indent="-342900">
+              <a:lnSpc>
+                <a:spcPct val="100000"/>
+              </a:lnSpc>
+              <a:spcAft>
+                <a:spcPts val="200"/>
+              </a:spcAft>
+              <a:buSzPct val="100000"/>
+              <a:buChar char="•"/>
+            </a:pPr>
+            <a:r>
+              <a:rPr lang="en-US" sz="780" dirty="0">
+                <a:solidFill>
+                  <a:srgbClr val="4A423C"/>
+                </a:solidFill>
+                <a:latin typeface="Microsoft YaHei" pitchFamily="34" charset="0"/>
+                <a:ea typeface="Microsoft YaHei" pitchFamily="34" charset="-122"/>
+                <a:cs typeface="Microsoft YaHei" pitchFamily="34" charset="-120"/>
+              </a:rPr>
+              <a:t>成交扣库存、归零自动下架</a:t>
+            </a:r>
+            <a:endParaRPr lang="en-US" sz="780" dirty="0"/>
+          </a:p>
+          <a:p>
+            <a:pPr marL="342900" indent="-342900">
+              <a:lnSpc>
+                <a:spcPct val="100000"/>
+              </a:lnSpc>
+              <a:spcAft>
+                <a:spcPts val="200"/>
+              </a:spcAft>
+              <a:buSzPct val="100000"/>
+              <a:buChar char="•"/>
+            </a:pPr>
+            <a:r>
+              <a:rPr lang="en-US" sz="780" dirty="0">
+                <a:solidFill>
+                  <a:srgbClr val="4A423C"/>
+                </a:solidFill>
+                <a:latin typeface="Microsoft YaHei" pitchFamily="34" charset="0"/>
+                <a:ea typeface="Microsoft YaHei" pitchFamily="34" charset="-122"/>
+                <a:cs typeface="Microsoft YaHei" pitchFamily="34" charset="-120"/>
+              </a:rPr>
+              <a:t>客户注册鉴权、历史下单、客户视图</a:t>
+            </a:r>
+            <a:endParaRPr lang="en-US" sz="780" dirty="0"/>
+          </a:p>
+        </p:txBody>
+      </p:sp>
+      <p:sp>
+        <p:nvSpPr>
+          <p:cNvPr id="15" name="Shape 11"/>
+          <p:cNvSpPr/>
+          <p:nvPr/>
+        </p:nvSpPr>
+        <p:spPr>
+          <a:xfrm>
+            <a:off x="6035040" y="1005840"/>
+            <a:ext cx="2651760" cy="1783080"/>
+          </a:xfrm>
+          <a:prstGeom prst="rect">
+            <a:avLst/>
+          </a:prstGeom>
+          <a:solidFill>
+            <a:srgbClr val="FFFFFF"/>
+          </a:solidFill>
+          <a:ln w="9525">
+            <a:solidFill>
+              <a:srgbClr val="E3DDD4"/>
+            </a:solidFill>
+            <a:prstDash val="solid"/>
+          </a:ln>
+          <a:effectLst>
+            <a:outerShdw sx="100000" sy="100000" kx="0" ky="0" algn="bl" rotWithShape="0" blurRad="101600" dist="25400" dir="8100000">
+              <a:srgbClr val="000000">
+                <a:alpha val="10000"/>
+              </a:srgbClr>
+            </a:outerShdw>
+          </a:effectLst>
+        </p:spPr>
+      </p:sp>
+      <p:sp>
+        <p:nvSpPr>
+          <p:cNvPr id="16" name="Shape 12"/>
+          <p:cNvSpPr/>
+          <p:nvPr/>
+        </p:nvSpPr>
+        <p:spPr>
+          <a:xfrm>
+            <a:off x="6035040" y="1005840"/>
+            <a:ext cx="2651760" cy="45720"/>
+          </a:xfrm>
+          <a:prstGeom prst="rect">
+            <a:avLst/>
+          </a:prstGeom>
+          <a:solidFill>
+            <a:srgbClr val="8A6F47"/>
+          </a:solidFill>
+          <a:ln/>
+        </p:spPr>
+      </p:sp>
+      <p:pic>
+        <p:nvPicPr>
+          <p:cNvPr id="17" name="Image 2" descr="C:\Users\yuanx\CodeBuddy\20260922075003\docs\wiki\screenshots\11-seller-products-v2.png">    </p:cNvPr>
+          <p:cNvPicPr>
+            <a:picLocks noChangeAspect="1"/>
+          </p:cNvPicPr>
+          <p:nvPr/>
+        </p:nvPicPr>
+        <p:blipFill>
+          <a:blip r:embed="rId3"/>
+          <a:srcRect l="0" r="0" t="0" b="0"/>
+          <a:stretch/>
+        </p:blipFill>
+        <p:spPr>
+          <a:xfrm>
+            <a:off x="6126480" y="1115568"/>
+            <a:ext cx="2468880" cy="868680"/>
+          </a:xfrm>
+          <a:prstGeom prst="rect">
+            <a:avLst/>
+          </a:prstGeom>
+        </p:spPr>
+      </p:pic>
+      <p:sp>
+        <p:nvSpPr>
+          <p:cNvPr id="18" name="Text 13"/>
+          <p:cNvSpPr/>
+          <p:nvPr/>
+        </p:nvSpPr>
+        <p:spPr>
+          <a:xfrm>
+            <a:off x="6144768" y="1938528"/>
+            <a:ext cx="2468880" cy="219456"/>
+          </a:xfrm>
+          <a:prstGeom prst="rect">
+            <a:avLst/>
+          </a:prstGeom>
+          <a:noFill/>
+          <a:ln/>
+        </p:spPr>
+        <p:txBody>
+          <a:bodyPr wrap="square" lIns="0" tIns="0" rIns="0" bIns="0" rtlCol="0" anchor="ctr"/>
+          <a:lstStyle/>
+          <a:p>
+            <a:pPr indent="0" marL="0">
+              <a:buNone/>
+            </a:pPr>
+            <a:r>
+              <a:rPr lang="en-US" sz="1100" b="1" dirty="0">
+                <a:solidFill>
+                  <a:srgbClr val="2B2622"/>
+                </a:solidFill>
+                <a:latin typeface="Microsoft YaHei" pitchFamily="34" charset="0"/>
+                <a:ea typeface="Microsoft YaHei" pitchFamily="34" charset="-122"/>
+                <a:cs typeface="Microsoft YaHei" pitchFamily="34" charset="-120"/>
+              </a:rPr>
+              <a:t>王则凯</a:t>
+            </a:r>
+            <a:pPr indent="0" marL="0">
+              <a:buNone/>
+            </a:pPr>
+            <a:r>
+              <a:rPr lang="en-US" sz="800" dirty="0">
+                <a:solidFill>
+                  <a:srgbClr val="8A8178"/>
+                </a:solidFill>
+                <a:latin typeface="Microsoft YaHei" pitchFamily="34" charset="0"/>
+                <a:ea typeface="Microsoft YaHei" pitchFamily="34" charset="-122"/>
+                <a:cs typeface="Microsoft YaHei" pitchFamily="34" charset="-120"/>
+              </a:rPr>
+              <a:t>  后端①</a:t>
+            </a:r>
+            <a:endParaRPr lang="en-US" sz="1100" dirty="0"/>
+          </a:p>
+        </p:txBody>
+      </p:sp>
+      <p:sp>
+        <p:nvSpPr>
+          <p:cNvPr id="19" name="Text 14"/>
+          <p:cNvSpPr/>
+          <p:nvPr/>
+        </p:nvSpPr>
+        <p:spPr>
+          <a:xfrm>
+            <a:off x="6144768" y="2157984"/>
+            <a:ext cx="2468880" cy="576072"/>
+          </a:xfrm>
+          <a:prstGeom prst="rect">
+            <a:avLst/>
+          </a:prstGeom>
+          <a:noFill/>
+          <a:ln/>
+        </p:spPr>
+        <p:txBody>
+          <a:bodyPr wrap="square" lIns="0" tIns="0" rIns="0" bIns="0" rtlCol="0" anchor="t"/>
+          <a:lstStyle/>
+          <a:p>
+            <a:pPr marL="342900" indent="-342900">
+              <a:lnSpc>
+                <a:spcPct val="100000"/>
+              </a:lnSpc>
+              <a:spcAft>
+                <a:spcPts val="200"/>
+              </a:spcAft>
+              <a:buSzPct val="100000"/>
+              <a:buChar char="•"/>
+            </a:pPr>
+            <a:r>
+              <a:rPr lang="en-US" sz="780" dirty="0">
+                <a:solidFill>
+                  <a:srgbClr val="4A423C"/>
+                </a:solidFill>
+                <a:latin typeface="Microsoft YaHei" pitchFamily="34" charset="0"/>
+                <a:ea typeface="Microsoft YaHei" pitchFamily="34" charset="-122"/>
+                <a:cs typeface="Microsoft YaHei" pitchFamily="34" charset="-120"/>
+              </a:rPr>
+              <a:t>商品发布 / 编辑 / 搜索接口</a:t>
+            </a:r>
+            <a:endParaRPr lang="en-US" sz="780" dirty="0"/>
+          </a:p>
+          <a:p>
+            <a:pPr marL="342900" indent="-342900">
+              <a:lnSpc>
+                <a:spcPct val="100000"/>
+              </a:lnSpc>
+              <a:spcAft>
+                <a:spcPts val="200"/>
+              </a:spcAft>
+              <a:buSzPct val="100000"/>
+              <a:buChar char="•"/>
+            </a:pPr>
+            <a:r>
+              <a:rPr lang="en-US" sz="780" dirty="0">
+                <a:solidFill>
+                  <a:srgbClr val="4A423C"/>
+                </a:solidFill>
+                <a:latin typeface="Microsoft YaHei" pitchFamily="34" charset="0"/>
+                <a:ea typeface="Microsoft YaHei" pitchFamily="34" charset="-122"/>
+                <a:cs typeface="Microsoft YaHei" pitchFamily="34" charset="-120"/>
+              </a:rPr>
+              <a:t>分类树与分类维护接口</a:t>
+            </a:r>
+            <a:endParaRPr lang="en-US" sz="780" dirty="0"/>
+          </a:p>
+          <a:p>
+            <a:pPr marL="342900" indent="-342900">
+              <a:lnSpc>
+                <a:spcPct val="100000"/>
+              </a:lnSpc>
+              <a:spcAft>
+                <a:spcPts val="200"/>
+              </a:spcAft>
+              <a:buSzPct val="100000"/>
+              <a:buChar char="•"/>
+            </a:pPr>
+            <a:r>
+              <a:rPr lang="en-US" sz="780" dirty="0">
+                <a:solidFill>
+                  <a:srgbClr val="4A423C"/>
+                </a:solidFill>
+                <a:latin typeface="Microsoft YaHei" pitchFamily="34" charset="0"/>
+                <a:ea typeface="Microsoft YaHei" pitchFamily="34" charset="-122"/>
+                <a:cs typeface="Microsoft YaHei" pitchFamily="34" charset="-120"/>
+              </a:rPr>
+              <a:t>卖家侧接口联调与参数校验</a:t>
+            </a:r>
+            <a:endParaRPr lang="en-US" sz="780" dirty="0"/>
+          </a:p>
+        </p:txBody>
+      </p:sp>
+      <p:sp>
+        <p:nvSpPr>
+          <p:cNvPr id="20" name="Shape 15"/>
+          <p:cNvSpPr/>
+          <p:nvPr/>
+        </p:nvSpPr>
+        <p:spPr>
+          <a:xfrm>
+            <a:off x="457200" y="2852928"/>
+            <a:ext cx="2651760" cy="1783080"/>
+          </a:xfrm>
+          <a:prstGeom prst="rect">
+            <a:avLst/>
+          </a:prstGeom>
+          <a:solidFill>
+            <a:srgbClr val="FFFFFF"/>
+          </a:solidFill>
+          <a:ln w="9525">
+            <a:solidFill>
+              <a:srgbClr val="E3DDD4"/>
+            </a:solidFill>
+            <a:prstDash val="solid"/>
+          </a:ln>
+          <a:effectLst>
+            <a:outerShdw sx="100000" sy="100000" kx="0" ky="0" algn="bl" rotWithShape="0" blurRad="101600" dist="25400" dir="8100000">
+              <a:srgbClr val="000000">
+                <a:alpha val="10000"/>
+              </a:srgbClr>
+            </a:outerShdw>
+          </a:effectLst>
+        </p:spPr>
+      </p:sp>
+      <p:sp>
+        <p:nvSpPr>
+          <p:cNvPr id="21" name="Shape 16"/>
+          <p:cNvSpPr/>
+          <p:nvPr/>
+        </p:nvSpPr>
+        <p:spPr>
+          <a:xfrm>
+            <a:off x="457200" y="2852928"/>
+            <a:ext cx="2651760" cy="45720"/>
+          </a:xfrm>
+          <a:prstGeom prst="rect">
+            <a:avLst/>
+          </a:prstGeom>
+          <a:solidFill>
+            <a:srgbClr val="8E3B33"/>
+          </a:solidFill>
+          <a:ln/>
+        </p:spPr>
+      </p:sp>
+      <p:pic>
+        <p:nvPicPr>
+          <p:cNvPr id="22" name="Image 3" descr="C:\Users\yuanx\CodeBuddy\20260922075003\docs\wiki\screenshots\12-seller-customers.png">    </p:cNvPr>
+          <p:cNvPicPr>
+            <a:picLocks noChangeAspect="1"/>
+          </p:cNvPicPr>
+          <p:nvPr/>
+        </p:nvPicPr>
+        <p:blipFill>
+          <a:blip r:embed="rId4"/>
+          <a:srcRect l="0" r="0" t="0" b="0"/>
+          <a:stretch/>
+        </p:blipFill>
+        <p:spPr>
+          <a:xfrm>
+            <a:off x="548640" y="2962656"/>
+            <a:ext cx="2468880" cy="868680"/>
+          </a:xfrm>
+          <a:prstGeom prst="rect">
+            <a:avLst/>
+          </a:prstGeom>
+        </p:spPr>
+      </p:pic>
+      <p:sp>
+        <p:nvSpPr>
+          <p:cNvPr id="23" name="Text 17"/>
+          <p:cNvSpPr/>
+          <p:nvPr/>
+        </p:nvSpPr>
+        <p:spPr>
+          <a:xfrm>
+            <a:off x="566928" y="3785616"/>
+            <a:ext cx="2468880" cy="219456"/>
+          </a:xfrm>
+          <a:prstGeom prst="rect">
+            <a:avLst/>
+          </a:prstGeom>
+          <a:noFill/>
+          <a:ln/>
+        </p:spPr>
+        <p:txBody>
+          <a:bodyPr wrap="square" lIns="0" tIns="0" rIns="0" bIns="0" rtlCol="0" anchor="ctr"/>
+          <a:lstStyle/>
+          <a:p>
+            <a:pPr indent="0" marL="0">
+              <a:buNone/>
+            </a:pPr>
+            <a:r>
+              <a:rPr lang="en-US" sz="1100" b="1" dirty="0">
+                <a:solidFill>
+                  <a:srgbClr val="2B2622"/>
+                </a:solidFill>
+                <a:latin typeface="Microsoft YaHei" pitchFamily="34" charset="0"/>
+                <a:ea typeface="Microsoft YaHei" pitchFamily="34" charset="-122"/>
+                <a:cs typeface="Microsoft YaHei" pitchFamily="34" charset="-120"/>
+              </a:rPr>
+              <a:t>戴英杰</a:t>
+            </a:r>
+            <a:pPr indent="0" marL="0">
+              <a:buNone/>
+            </a:pPr>
+            <a:r>
+              <a:rPr lang="en-US" sz="800" dirty="0">
+                <a:solidFill>
+                  <a:srgbClr val="8A8178"/>
+                </a:solidFill>
+                <a:latin typeface="Microsoft YaHei" pitchFamily="34" charset="0"/>
+                <a:ea typeface="Microsoft YaHei" pitchFamily="34" charset="-122"/>
+                <a:cs typeface="Microsoft YaHei" pitchFamily="34" charset="-120"/>
+              </a:rPr>
+              <a:t>  测试</a:t>
+            </a:r>
+            <a:endParaRPr lang="en-US" sz="1100" dirty="0"/>
+          </a:p>
+        </p:txBody>
+      </p:sp>
+      <p:sp>
+        <p:nvSpPr>
+          <p:cNvPr id="24" name="Text 18"/>
+          <p:cNvSpPr/>
+          <p:nvPr/>
+        </p:nvSpPr>
+        <p:spPr>
+          <a:xfrm>
+            <a:off x="566928" y="4005072"/>
+            <a:ext cx="2468880" cy="576072"/>
+          </a:xfrm>
+          <a:prstGeom prst="rect">
+            <a:avLst/>
+          </a:prstGeom>
+          <a:noFill/>
+          <a:ln/>
+        </p:spPr>
+        <p:txBody>
+          <a:bodyPr wrap="square" lIns="0" tIns="0" rIns="0" bIns="0" rtlCol="0" anchor="t"/>
+          <a:lstStyle/>
+          <a:p>
+            <a:pPr marL="342900" indent="-342900">
+              <a:lnSpc>
+                <a:spcPct val="100000"/>
+              </a:lnSpc>
+              <a:spcAft>
+                <a:spcPts val="200"/>
+              </a:spcAft>
+              <a:buSzPct val="100000"/>
+              <a:buChar char="•"/>
+            </a:pPr>
+            <a:r>
+              <a:rPr lang="en-US" sz="780" dirty="0">
+                <a:solidFill>
+                  <a:srgbClr val="4A423C"/>
+                </a:solidFill>
+                <a:latin typeface="Microsoft YaHei" pitchFamily="34" charset="0"/>
+                <a:ea typeface="Microsoft YaHei" pitchFamily="34" charset="-122"/>
+                <a:cs typeface="Microsoft YaHei" pitchFamily="34" charset="-120"/>
+              </a:rPr>
+              <a:t>A.1/A.2 界面走查与端到端验证</a:t>
+            </a:r>
+            <a:endParaRPr lang="en-US" sz="780" dirty="0"/>
+          </a:p>
+          <a:p>
+            <a:pPr marL="342900" indent="-342900">
+              <a:lnSpc>
+                <a:spcPct val="100000"/>
+              </a:lnSpc>
+              <a:spcAft>
+                <a:spcPts val="200"/>
+              </a:spcAft>
+              <a:buSzPct val="100000"/>
+              <a:buChar char="•"/>
+            </a:pPr>
+            <a:r>
+              <a:rPr lang="en-US" sz="780" dirty="0">
+                <a:solidFill>
+                  <a:srgbClr val="4A423C"/>
+                </a:solidFill>
+                <a:latin typeface="Microsoft YaHei" pitchFamily="34" charset="0"/>
+                <a:ea typeface="Microsoft YaHei" pitchFamily="34" charset="-122"/>
+                <a:cs typeface="Microsoft YaHei" pitchFamily="34" charset="-120"/>
+              </a:rPr>
+              <a:t>12 项升级用例结果复核</a:t>
+            </a:r>
+            <a:endParaRPr lang="en-US" sz="780" dirty="0"/>
+          </a:p>
+          <a:p>
+            <a:pPr marL="342900" indent="-342900">
+              <a:lnSpc>
+                <a:spcPct val="100000"/>
+              </a:lnSpc>
+              <a:spcAft>
+                <a:spcPts val="200"/>
+              </a:spcAft>
+              <a:buSzPct val="100000"/>
+              <a:buChar char="•"/>
+            </a:pPr>
+            <a:r>
+              <a:rPr lang="en-US" sz="780" dirty="0">
+                <a:solidFill>
+                  <a:srgbClr val="4A423C"/>
+                </a:solidFill>
+                <a:latin typeface="Microsoft YaHei" pitchFamily="34" charset="0"/>
+                <a:ea typeface="Microsoft YaHei" pitchFamily="34" charset="-122"/>
+                <a:cs typeface="Microsoft YaHei" pitchFamily="34" charset="-120"/>
+              </a:rPr>
+              <a:t>Sprint 1 主流程与规则约束验证</a:t>
+            </a:r>
+            <a:endParaRPr lang="en-US" sz="780" dirty="0"/>
+          </a:p>
+        </p:txBody>
+      </p:sp>
+      <p:sp>
+        <p:nvSpPr>
+          <p:cNvPr id="25" name="Shape 19"/>
+          <p:cNvSpPr/>
+          <p:nvPr/>
+        </p:nvSpPr>
+        <p:spPr>
+          <a:xfrm>
+            <a:off x="3246120" y="2852928"/>
+            <a:ext cx="2651760" cy="1783080"/>
+          </a:xfrm>
+          <a:prstGeom prst="rect">
+            <a:avLst/>
+          </a:prstGeom>
+          <a:solidFill>
+            <a:srgbClr val="FFFFFF"/>
+          </a:solidFill>
+          <a:ln w="9525">
+            <a:solidFill>
+              <a:srgbClr val="E3DDD4"/>
+            </a:solidFill>
+            <a:prstDash val="solid"/>
+          </a:ln>
+          <a:effectLst>
+            <a:outerShdw sx="100000" sy="100000" kx="0" ky="0" algn="bl" rotWithShape="0" blurRad="101600" dist="25400" dir="8100000">
+              <a:srgbClr val="000000">
+                <a:alpha val="10000"/>
+              </a:srgbClr>
+            </a:outerShdw>
+          </a:effectLst>
+        </p:spPr>
+      </p:sp>
+      <p:sp>
+        <p:nvSpPr>
+          <p:cNvPr id="26" name="Shape 20"/>
+          <p:cNvSpPr/>
+          <p:nvPr/>
+        </p:nvSpPr>
+        <p:spPr>
+          <a:xfrm>
+            <a:off x="3246120" y="2852928"/>
+            <a:ext cx="2651760" cy="45720"/>
+          </a:xfrm>
+          <a:prstGeom prst="rect">
+            <a:avLst/>
+          </a:prstGeom>
+          <a:solidFill>
+            <a:srgbClr val="8A8178"/>
+          </a:solidFill>
+          <a:ln/>
+        </p:spPr>
+      </p:sp>
+      <p:pic>
+        <p:nvPicPr>
+          <p:cNvPr id="27" name="Image 4" descr="C:\Users\yuanx\CodeBuddy\20260922075003\docs\wiki\slides\slide01.png">    </p:cNvPr>
+          <p:cNvPicPr>
+            <a:picLocks noChangeAspect="1"/>
+          </p:cNvPicPr>
+          <p:nvPr/>
+        </p:nvPicPr>
+        <p:blipFill>
+          <a:blip r:embed="rId5"/>
+          <a:srcRect l="0" r="0" t="0" b="0"/>
+          <a:stretch/>
+        </p:blipFill>
+        <p:spPr>
+          <a:xfrm>
+            <a:off x="3337560" y="2962656"/>
+            <a:ext cx="2468880" cy="868680"/>
+          </a:xfrm>
+          <a:prstGeom prst="rect">
+            <a:avLst/>
+          </a:prstGeom>
+        </p:spPr>
+      </p:pic>
+      <p:sp>
+        <p:nvSpPr>
+          <p:cNvPr id="28" name="Text 21"/>
+          <p:cNvSpPr/>
+          <p:nvPr/>
+        </p:nvSpPr>
+        <p:spPr>
+          <a:xfrm>
+            <a:off x="3355848" y="3785616"/>
+            <a:ext cx="2468880" cy="219456"/>
+          </a:xfrm>
+          <a:prstGeom prst="rect">
+            <a:avLst/>
+          </a:prstGeom>
+          <a:noFill/>
+          <a:ln/>
+        </p:spPr>
+        <p:txBody>
+          <a:bodyPr wrap="square" lIns="0" tIns="0" rIns="0" bIns="0" rtlCol="0" anchor="ctr"/>
+          <a:lstStyle/>
+          <a:p>
+            <a:pPr indent="0" marL="0">
+              <a:buNone/>
+            </a:pPr>
+            <a:r>
+              <a:rPr lang="en-US" sz="1100" b="1" dirty="0">
+                <a:solidFill>
+                  <a:srgbClr val="2B2622"/>
+                </a:solidFill>
+                <a:latin typeface="Microsoft YaHei" pitchFamily="34" charset="0"/>
+                <a:ea typeface="Microsoft YaHei" pitchFamily="34" charset="-122"/>
+                <a:cs typeface="Microsoft YaHei" pitchFamily="34" charset="-120"/>
+              </a:rPr>
+              <a:t>何易</a:t>
+            </a:r>
+            <a:pPr indent="0" marL="0">
+              <a:buNone/>
+            </a:pPr>
+            <a:r>
+              <a:rPr lang="en-US" sz="800" dirty="0">
+                <a:solidFill>
+                  <a:srgbClr val="8A8178"/>
+                </a:solidFill>
+                <a:latin typeface="Microsoft YaHei" pitchFamily="34" charset="0"/>
+                <a:ea typeface="Microsoft YaHei" pitchFamily="34" charset="-122"/>
+                <a:cs typeface="Microsoft YaHei" pitchFamily="34" charset="-120"/>
+              </a:rPr>
+              <a:t>  文档 / 组长</a:t>
+            </a:r>
+            <a:endParaRPr lang="en-US" sz="1100" dirty="0"/>
+          </a:p>
+        </p:txBody>
+      </p:sp>
+      <p:sp>
+        <p:nvSpPr>
+          <p:cNvPr id="29" name="Text 22"/>
+          <p:cNvSpPr/>
+          <p:nvPr/>
+        </p:nvSpPr>
+        <p:spPr>
+          <a:xfrm>
+            <a:off x="3355848" y="4005072"/>
+            <a:ext cx="2468880" cy="576072"/>
+          </a:xfrm>
+          <a:prstGeom prst="rect">
+            <a:avLst/>
+          </a:prstGeom>
+          <a:noFill/>
+          <a:ln/>
+        </p:spPr>
+        <p:txBody>
+          <a:bodyPr wrap="square" lIns="0" tIns="0" rIns="0" bIns="0" rtlCol="0" anchor="t"/>
+          <a:lstStyle/>
+          <a:p>
+            <a:pPr marL="342900" indent="-342900">
+              <a:lnSpc>
+                <a:spcPct val="100000"/>
+              </a:lnSpc>
+              <a:spcAft>
+                <a:spcPts val="200"/>
+              </a:spcAft>
+              <a:buSzPct val="100000"/>
+              <a:buChar char="•"/>
+            </a:pPr>
+            <a:r>
+              <a:rPr lang="en-US" sz="780" dirty="0">
+                <a:solidFill>
+                  <a:srgbClr val="4A423C"/>
+                </a:solidFill>
+                <a:latin typeface="Microsoft YaHei" pitchFamily="34" charset="0"/>
+                <a:ea typeface="Microsoft YaHei" pitchFamily="34" charset="-122"/>
+                <a:cs typeface="Microsoft YaHei" pitchFamily="34" charset="-120"/>
+              </a:rPr>
+              <a:t>需求条目登记与状态更新</a:t>
+            </a:r>
+            <a:endParaRPr lang="en-US" sz="780" dirty="0"/>
+          </a:p>
+          <a:p>
+            <a:pPr marL="342900" indent="-342900">
+              <a:lnSpc>
+                <a:spcPct val="100000"/>
+              </a:lnSpc>
+              <a:spcAft>
+                <a:spcPts val="200"/>
+              </a:spcAft>
+              <a:buSzPct val="100000"/>
+              <a:buChar char="•"/>
+            </a:pPr>
+            <a:r>
+              <a:rPr lang="en-US" sz="780" dirty="0">
+                <a:solidFill>
+                  <a:srgbClr val="4A423C"/>
+                </a:solidFill>
+                <a:latin typeface="Microsoft YaHei" pitchFamily="34" charset="0"/>
+                <a:ea typeface="Microsoft YaHei" pitchFamily="34" charset="-122"/>
+                <a:cs typeface="Microsoft YaHei" pitchFamily="34" charset="-120"/>
+              </a:rPr>
+              <a:t>报告、14 页讲述版 PPT 与讲稿</a:t>
+            </a:r>
+            <a:endParaRPr lang="en-US" sz="780" dirty="0"/>
+          </a:p>
+          <a:p>
+            <a:pPr marL="342900" indent="-342900">
+              <a:lnSpc>
+                <a:spcPct val="100000"/>
+              </a:lnSpc>
+              <a:spcAft>
+                <a:spcPts val="200"/>
+              </a:spcAft>
+              <a:buSzPct val="100000"/>
+              <a:buChar char="•"/>
+            </a:pPr>
+            <a:r>
+              <a:rPr lang="en-US" sz="780" dirty="0">
+                <a:solidFill>
+                  <a:srgbClr val="4A423C"/>
+                </a:solidFill>
+                <a:latin typeface="Microsoft YaHei" pitchFamily="34" charset="0"/>
+                <a:ea typeface="Microsoft YaHei" pitchFamily="34" charset="-122"/>
+                <a:cs typeface="Microsoft YaHei" pitchFamily="34" charset="-120"/>
+              </a:rPr>
+              <a:t>测试说明同步、Wiki 发布与协调</a:t>
+            </a:r>
+            <a:endParaRPr lang="en-US" sz="780" dirty="0"/>
+          </a:p>
+        </p:txBody>
+      </p:sp>
+      <p:sp>
+        <p:nvSpPr>
+          <p:cNvPr id="30" name="Shape 23"/>
+          <p:cNvSpPr/>
+          <p:nvPr/>
+        </p:nvSpPr>
+        <p:spPr>
+          <a:xfrm>
+            <a:off x="6035040" y="2852928"/>
+            <a:ext cx="2651760" cy="1783080"/>
+          </a:xfrm>
+          <a:prstGeom prst="rect">
+            <a:avLst/>
+          </a:prstGeom>
+          <a:solidFill>
+            <a:srgbClr val="E7E8D1"/>
+          </a:solidFill>
+          <a:ln/>
+        </p:spPr>
+      </p:sp>
+      <p:sp>
+        <p:nvSpPr>
+          <p:cNvPr id="31" name="Text 24"/>
+          <p:cNvSpPr/>
+          <p:nvPr/>
+        </p:nvSpPr>
+        <p:spPr>
+          <a:xfrm>
+            <a:off x="6172200" y="2944368"/>
+            <a:ext cx="2377440" cy="256032"/>
+          </a:xfrm>
+          <a:prstGeom prst="rect">
+            <a:avLst/>
+          </a:prstGeom>
+          <a:noFill/>
+          <a:ln/>
+        </p:spPr>
+        <p:txBody>
+          <a:bodyPr wrap="square" lIns="0" tIns="0" rIns="0" bIns="0" rtlCol="0" anchor="ctr"/>
+          <a:lstStyle/>
+          <a:p>
+            <a:pPr indent="0" marL="0">
+              <a:buNone/>
+            </a:pPr>
+            <a:r>
+              <a:rPr lang="en-US" sz="1100" b="1" dirty="0">
+                <a:solidFill>
+                  <a:srgbClr val="2B2622"/>
+                </a:solidFill>
+                <a:latin typeface="Microsoft YaHei" pitchFamily="34" charset="0"/>
+                <a:ea typeface="Microsoft YaHei" pitchFamily="34" charset="-122"/>
+                <a:cs typeface="Microsoft YaHei" pitchFamily="34" charset="-120"/>
+              </a:rPr>
+              <a:t>本轮交付规模</a:t>
+            </a:r>
+            <a:endParaRPr lang="en-US" sz="1100" dirty="0"/>
+          </a:p>
+        </p:txBody>
+      </p:sp>
+      <p:sp>
+        <p:nvSpPr>
+          <p:cNvPr id="32" name="Text 25"/>
+          <p:cNvSpPr/>
+          <p:nvPr/>
+        </p:nvSpPr>
+        <p:spPr>
+          <a:xfrm>
+            <a:off x="6172200" y="3264408"/>
+            <a:ext cx="2377440" cy="1280160"/>
+          </a:xfrm>
+          <a:prstGeom prst="rect">
+            <a:avLst/>
+          </a:prstGeom>
+          <a:noFill/>
+          <a:ln/>
+        </p:spPr>
+        <p:txBody>
+          <a:bodyPr wrap="square" lIns="0" tIns="0" rIns="0" bIns="0" rtlCol="0" anchor="t"/>
+          <a:lstStyle/>
+          <a:p>
+            <a:pPr indent="0" marL="0">
+              <a:spcAft>
+                <a:spcPts val="300"/>
+              </a:spcAft>
+              <a:buNone/>
+            </a:pPr>
+            <a:r>
+              <a:rPr lang="en-US" sz="850" dirty="0">
+                <a:solidFill>
+                  <a:srgbClr val="4A423C"/>
+                </a:solidFill>
+                <a:latin typeface="Microsoft YaHei" pitchFamily="34" charset="0"/>
+                <a:ea typeface="Microsoft YaHei" pitchFamily="34" charset="-122"/>
+                <a:cs typeface="Microsoft YaHei" pitchFamily="34" charset="-120"/>
+              </a:rPr>
+              <a:t>提交：4f2fde7</a:t>
+            </a:r>
+            <a:endParaRPr lang="en-US" sz="850" dirty="0"/>
+          </a:p>
+          <a:p>
+            <a:pPr indent="0" marL="0">
+              <a:spcAft>
+                <a:spcPts val="300"/>
+              </a:spcAft>
+              <a:buNone/>
+            </a:pPr>
+            <a:r>
+              <a:rPr lang="en-US" sz="850" dirty="0">
+                <a:solidFill>
+                  <a:srgbClr val="4A423C"/>
+                </a:solidFill>
+                <a:latin typeface="Microsoft YaHei" pitchFamily="34" charset="0"/>
+                <a:ea typeface="Microsoft YaHei" pitchFamily="34" charset="-122"/>
+                <a:cs typeface="Microsoft YaHei" pitchFamily="34" charset="-120"/>
+              </a:rPr>
+              <a:t>变更：31 文件 / +1148 −546</a:t>
+            </a:r>
+            <a:endParaRPr lang="en-US" sz="850" dirty="0"/>
+          </a:p>
+          <a:p>
+            <a:pPr indent="0" marL="0">
+              <a:spcAft>
+                <a:spcPts val="300"/>
+              </a:spcAft>
+              <a:buNone/>
+            </a:pPr>
+            <a:r>
+              <a:rPr lang="en-US" sz="850" dirty="0">
+                <a:solidFill>
+                  <a:srgbClr val="4A423C"/>
+                </a:solidFill>
+                <a:latin typeface="Microsoft YaHei" pitchFamily="34" charset="0"/>
+                <a:ea typeface="Microsoft YaHei" pitchFamily="34" charset="-122"/>
+                <a:cs typeface="Microsoft YaHei" pitchFamily="34" charset="-120"/>
+              </a:rPr>
+              <a:t>验证：12 用例 · 7 张截图</a:t>
+            </a:r>
+            <a:endParaRPr lang="en-US" sz="850" dirty="0"/>
+          </a:p>
+          <a:p>
+            <a:pPr indent="0" marL="0">
+              <a:spcAft>
+                <a:spcPts val="300"/>
+              </a:spcAft>
+              <a:buNone/>
+            </a:pPr>
+            <a:r>
+              <a:rPr lang="en-US" sz="850" dirty="0">
+                <a:solidFill>
+                  <a:srgbClr val="4A423C"/>
+                </a:solidFill>
+                <a:latin typeface="Microsoft YaHei" pitchFamily="34" charset="0"/>
+                <a:ea typeface="Microsoft YaHei" pitchFamily="34" charset="-122"/>
+                <a:cs typeface="Microsoft YaHei" pitchFamily="34" charset="-120"/>
+              </a:rPr>
+              <a:t>材料：14 页 PPT · 本报告</a:t>
+            </a:r>
+            <a:endParaRPr lang="en-US" sz="850" dirty="0"/>
+          </a:p>
+        </p:txBody>
+      </p:sp>
+      <p:sp>
+        <p:nvSpPr>
+          <p:cNvPr id="33" name="Text 26"/>
+          <p:cNvSpPr/>
+          <p:nvPr/>
+        </p:nvSpPr>
+        <p:spPr>
+          <a:xfrm>
+            <a:off x="8412480" y="4617720"/>
+            <a:ext cx="457200" cy="256032"/>
+          </a:xfrm>
+          <a:prstGeom prst="rect">
+            <a:avLst/>
+          </a:prstGeom>
+          <a:noFill/>
+          <a:ln/>
+        </p:spPr>
+        <p:txBody>
+          <a:bodyPr wrap="square" lIns="0" tIns="0" rIns="0" bIns="0" rtlCol="0" anchor="ctr"/>
+          <a:lstStyle/>
+          <a:p>
+            <a:pPr algn="r" indent="0" marL="0">
+              <a:buNone/>
+            </a:pPr>
+            <a:r>
+              <a:rPr lang="en-US" sz="900" dirty="0">
+                <a:solidFill>
+                  <a:srgbClr val="8A8178"/>
+                </a:solidFill>
+                <a:latin typeface="Microsoft YaHei" pitchFamily="34" charset="0"/>
+                <a:ea typeface="Microsoft YaHei" pitchFamily="34" charset="-122"/>
+                <a:cs typeface="Microsoft YaHei" pitchFamily="34" charset="-120"/>
+              </a:rPr>
+              <a:t>12</a:t>
+            </a:r>
+            <a:endParaRPr lang="en-US" sz="900" dirty="0"/>
+          </a:p>
+        </p:txBody>
+      </p:sp>
+    </p:spTree>
+  </p:cSld>
+  <p:clrMapOvr>
+    <a:masterClrMapping/>
+  </p:clrMapOvr>
+</p:sld>
+</file>
+
+<file path=ppt/slides/slide13.xml><?xml version="1.0" encoding="utf-8"?>
+<p:sld xmlns:a="http://schemas.openxmlformats.org/drawingml/2006/main" xmlns:r="http://schemas.openxmlformats.org/officeDocument/2006/relationships" xmlns:p="http://schemas.openxmlformats.org/presentationml/2006/main">
+  <p:cSld name="Slide 13">
+    <p:bg>
+      <p:bgPr>
+        <a:solidFill>
+          <a:srgbClr val="FBF8F3"/>
+        </a:solidFill>
+      </p:bgPr>
+    </p:bg>
+    <p:spTree>
+      <p:nvGrpSpPr>
+        <p:cNvPr id="1" name=""/>
+        <p:cNvGrpSpPr/>
+        <p:nvPr/>
+      </p:nvGrpSpPr>
+      <p:grpSpPr>
+        <a:xfrm>
+          <a:off x="0" y="0"/>
+          <a:ext cx="0" cy="0"/>
+          <a:chOff x="0" y="0"/>
+          <a:chExt cx="0" cy="0"/>
+        </a:xfrm>
+      </p:grpSpPr>
+      <p:sp>
+        <p:nvSpPr>
+          <p:cNvPr id="2" name="Shape 0"/>
+          <p:cNvSpPr/>
+          <p:nvPr/>
+        </p:nvSpPr>
+        <p:spPr>
+          <a:xfrm>
+            <a:off x="0" y="0"/>
+            <a:ext cx="9144000" cy="82296"/>
+          </a:xfrm>
+          <a:prstGeom prst="rect">
+            <a:avLst/>
+          </a:prstGeom>
+          <a:solidFill>
             <a:srgbClr val="8A8178"/>
           </a:solidFill>
           <a:ln/>
@@ -5060,7 +6383,7 @@
       </p:sp>
       <p:graphicFrame>
         <p:nvGraphicFramePr>
-          <p:cNvPr id="13" name="Table 0"/>
+          <p:cNvPr id="14" name="Table 0"/>
           <p:cNvGraphicFramePr>
             <a:graphicFrameLocks noGrp="1"/>
           </p:cNvGraphicFramePr>
@@ -6623,7 +7946,7 @@
                 <a:ea typeface="Microsoft YaHei" pitchFamily="34" charset="-122"/>
                 <a:cs typeface="Microsoft YaHei" pitchFamily="34" charset="-120"/>
               </a:rPr>
-              <a:t>12</a:t>
+              <a:t>13</a:t>
             </a:r>
             <a:endParaRPr lang="en-US" sz="900" dirty="0"/>
           </a:p>
@@ -6637,9 +7960,9 @@
 </p:sld>
 </file>
 
-<file path=ppt/slides/slide13.xml><?xml version="1.0" encoding="utf-8"?>
+<file path=ppt/slides/slide14.xml><?xml version="1.0" encoding="utf-8"?>
 <p:sld xmlns:a="http://schemas.openxmlformats.org/drawingml/2006/main" xmlns:r="http://schemas.openxmlformats.org/officeDocument/2006/relationships" xmlns:p="http://schemas.openxmlformats.org/presentationml/2006/main">
-  <p:cSld name="Slide 13">
+  <p:cSld name="Slide 14">
     <p:bg>
       <p:bgPr>
         <a:solidFill>
